--- a/Hindi_Semantic_Search_Presentation.pptx
+++ b/Hindi_Semantic_Search_Presentation.pptx
@@ -4,6 +4,9 @@
   <p:sldMasterIdLst>
     <p:sldMasterId id="2147483648" r:id="rId1"/>
   </p:sldMasterIdLst>
+  <p:notesMasterIdLst>
+    <p:notesMasterId r:id="rId13"/>
+  </p:notesMasterIdLst>
   <p:sldIdLst>
     <p:sldId id="256" r:id="rId2"/>
     <p:sldId id="257" r:id="rId3"/>
@@ -17,10 +20,7 @@
     <p:sldId id="265" r:id="rId11"/>
     <p:sldId id="266" r:id="rId12"/>
   </p:sldIdLst>
-  <p:notesMasterIdLst>
-    <p:notesMasterId r:id="rId13"/>
-  </p:notesMasterIdLst>
-  <p:sldSz cx="9144000" cy="5143500"/>
+  <p:sldSz cx="9144000" cy="5143500" type="screen16x9"/>
   <p:notesSz cx="5143500" cy="9144000"/>
   <p:defaultTextStyle>
     <a:lvl1pPr marL="0" algn="l" defTabSz="914400" rtl="0" eaLnBrk="1" latinLnBrk="0" hangingPunct="1">
@@ -114,6 +114,11 @@
       </a:defRPr>
     </a:lvl9pPr>
   </p:defaultTextStyle>
+  <p:extLst>
+    <p:ext uri="{EFAFB233-063F-42B5-8137-9DF3F51BA10A}">
+      <p15:sldGuideLst xmlns:p15="http://schemas.microsoft.com/office/powerpoint/2012/main"/>
+    </p:ext>
+  </p:extLst>
 </p:presentation>
 </file>
 
@@ -139,234 +144,10 @@
           <a:chExt cx="0" cy="0"/>
         </a:xfrm>
       </p:grpSpPr>
-      <p:sp>
-        <p:nvSpPr>
-          <p:cNvPr id="2" name="Header Placeholder 1"/>
-          <p:cNvSpPr>
-            <a:spLocks noGrp="1"/>
-          </p:cNvSpPr>
-          <p:nvPr>
-            <p:ph type="hdr" sz="quarter"/>
-          </p:nvPr>
-        </p:nvSpPr>
-        <p:spPr>
-          <a:xfrm>
-            <a:off x="0" y="0"/>
-            <a:ext cx="2971800" cy="458788"/>
-          </a:xfrm>
-          <a:prstGeom prst="rect">
-            <a:avLst/>
-          </a:prstGeom>
-        </p:spPr>
-        <p:txBody>
-          <a:bodyPr vert="horz" lIns="91440" tIns="45720" rIns="91440" bIns="45720" rtlCol="0"/>
-          <a:lstStyle>
-            <a:lvl1pPr algn="l">
-              <a:defRPr sz="1200"/>
-            </a:lvl1pPr>
-          </a:lstStyle>
-          <a:p>
-            <a:endParaRPr lang="en-US"/>
-          </a:p>
-        </p:txBody>
-      </p:sp>
-      <p:sp>
-        <p:nvSpPr>
-          <p:cNvPr id="3" name="Date Placeholder 2"/>
-          <p:cNvSpPr>
-            <a:spLocks noGrp="1"/>
-          </p:cNvSpPr>
-          <p:nvPr>
-            <p:ph type="dt" idx="1"/>
-          </p:nvPr>
-        </p:nvSpPr>
-        <p:spPr>
-          <a:xfrm>
-            <a:off x="3884613" y="0"/>
-            <a:ext cx="2971800" cy="458788"/>
-          </a:xfrm>
-          <a:prstGeom prst="rect">
-            <a:avLst/>
-          </a:prstGeom>
-        </p:spPr>
-        <p:txBody>
-          <a:bodyPr vert="horz" lIns="91440" tIns="45720" rIns="91440" bIns="45720" rtlCol="0"/>
-          <a:lstStyle>
-            <a:lvl1pPr algn="r">
-              <a:defRPr sz="1200"/>
-            </a:lvl1pPr>
-          </a:lstStyle>
-          <a:p>
-            <a:fld id="{5282F153-3F37-0F45-9E97-73ACFA13230C}" type="datetimeFigureOut">
-              <a:rPr lang="en-US"/>
-              <a:t>7/23/19</a:t>
-            </a:fld>
-            <a:endParaRPr lang="en-US"/>
-          </a:p>
-        </p:txBody>
-      </p:sp>
-      <p:sp>
-        <p:nvSpPr>
-          <p:cNvPr id="4" name="Slide Image Placeholder 3"/>
-          <p:cNvSpPr>
-            <a:spLocks noGrp="1" noRot="1" noChangeAspect="1"/>
-          </p:cNvSpPr>
-          <p:nvPr>
-            <p:ph type="sldImg" idx="2"/>
-          </p:nvPr>
-        </p:nvSpPr>
-        <p:spPr>
-          <a:xfrm>
-            <a:off x="685800" y="1143000"/>
-            <a:ext cx="5486400" cy="3086100"/>
-          </a:xfrm>
-          <a:prstGeom prst="rect">
-            <a:avLst/>
-          </a:prstGeom>
-          <a:noFill/>
-          <a:ln w="12700">
-            <a:solidFill>
-              <a:prstClr val="black"/>
-            </a:solidFill>
-          </a:ln>
-        </p:spPr>
-        <p:txBody>
-          <a:bodyPr vert="horz" lIns="91440" tIns="45720" rIns="91440" bIns="45720" rtlCol="0" anchor="ctr"/>
-          <a:lstStyle/>
-          <a:p>
-            <a:endParaRPr lang="en-US"/>
-          </a:p>
-        </p:txBody>
-      </p:sp>
-      <p:sp>
-        <p:nvSpPr>
-          <p:cNvPr id="5" name="Notes Placeholder 4"/>
-          <p:cNvSpPr>
-            <a:spLocks noGrp="1"/>
-          </p:cNvSpPr>
-          <p:nvPr>
-            <p:ph type="body" sz="quarter" idx="3"/>
-          </p:nvPr>
-        </p:nvSpPr>
-        <p:spPr>
-          <a:xfrm>
-            <a:off x="685800" y="4400550"/>
-            <a:ext cx="5486400" cy="3600450"/>
-          </a:xfrm>
-          <a:prstGeom prst="rect">
-            <a:avLst/>
-          </a:prstGeom>
-        </p:spPr>
-        <p:txBody>
-          <a:bodyPr vert="horz" lIns="91440" tIns="45720" rIns="91440" bIns="45720" rtlCol="0"/>
-          <a:lstStyle/>
-          <a:p>
-            <a:pPr lvl="0"/>
-            <a:r>
-              <a:rPr lang="en-US"/>
-              <a:t>Click to edit Master text styles</a:t>
-            </a:r>
-          </a:p>
-          <a:p>
-            <a:pPr lvl="1"/>
-            <a:r>
-              <a:rPr lang="en-US"/>
-              <a:t>Second level</a:t>
-            </a:r>
-          </a:p>
-          <a:p>
-            <a:pPr lvl="2"/>
-            <a:r>
-              <a:rPr lang="en-US"/>
-              <a:t>Third level</a:t>
-            </a:r>
-          </a:p>
-          <a:p>
-            <a:pPr lvl="3"/>
-            <a:r>
-              <a:rPr lang="en-US"/>
-              <a:t>Fourth level</a:t>
-            </a:r>
-          </a:p>
-          <a:p>
-            <a:pPr lvl="4"/>
-            <a:r>
-              <a:rPr lang="en-US"/>
-              <a:t>Fifth level</a:t>
-            </a:r>
-          </a:p>
-        </p:txBody>
-      </p:sp>
-      <p:sp>
-        <p:nvSpPr>
-          <p:cNvPr id="6" name="Footer Placeholder 5"/>
-          <p:cNvSpPr>
-            <a:spLocks noGrp="1"/>
-          </p:cNvSpPr>
-          <p:nvPr>
-            <p:ph type="ftr" sz="quarter" idx="4"/>
-          </p:nvPr>
-        </p:nvSpPr>
-        <p:spPr>
-          <a:xfrm>
-            <a:off x="0" y="8685213"/>
-            <a:ext cx="2971800" cy="458787"/>
-          </a:xfrm>
-          <a:prstGeom prst="rect">
-            <a:avLst/>
-          </a:prstGeom>
-        </p:spPr>
-        <p:txBody>
-          <a:bodyPr vert="horz" lIns="91440" tIns="45720" rIns="91440" bIns="45720" rtlCol="0" anchor="b"/>
-          <a:lstStyle>
-            <a:lvl1pPr algn="l">
-              <a:defRPr sz="1200"/>
-            </a:lvl1pPr>
-          </a:lstStyle>
-          <a:p>
-            <a:endParaRPr lang="en-US"/>
-          </a:p>
-        </p:txBody>
-      </p:sp>
-      <p:sp>
-        <p:nvSpPr>
-          <p:cNvPr id="7" name="Slide Number Placeholder 6"/>
-          <p:cNvSpPr>
-            <a:spLocks noGrp="1"/>
-          </p:cNvSpPr>
-          <p:nvPr>
-            <p:ph type="sldNum" sz="quarter" idx="5"/>
-          </p:nvPr>
-        </p:nvSpPr>
-        <p:spPr>
-          <a:xfrm>
-            <a:off x="3884613" y="8685213"/>
-            <a:ext cx="2971800" cy="458787"/>
-          </a:xfrm>
-          <a:prstGeom prst="rect">
-            <a:avLst/>
-          </a:prstGeom>
-        </p:spPr>
-        <p:txBody>
-          <a:bodyPr vert="horz" lIns="91440" tIns="45720" rIns="91440" bIns="45720" rtlCol="0" anchor="b"/>
-          <a:lstStyle>
-            <a:lvl1pPr algn="r">
-              <a:defRPr sz="1200"/>
-            </a:lvl1pPr>
-          </a:lstStyle>
-          <a:p>
-            <a:fld id="{CE5E9CC1-C706-0F49-92D6-E571CC5EEA8F}" type="slidenum">
-              <a:rPr lang="en-US"/>
-              <a:t>‹#›</a:t>
-            </a:fld>
-            <a:endParaRPr lang="en-US"/>
-          </a:p>
-        </p:txBody>
-      </p:sp>
     </p:spTree>
     <p:extLst>
       <p:ext uri="{BB962C8B-B14F-4D97-AF65-F5344CB8AC3E}">
-        <p14:creationId xmlns:p14="http://schemas.microsoft.com/office/powerpoint/2010/main" val="1024086991"/>
+        <p14:creationId xmlns:p14="http://schemas.microsoft.com/office/powerpoint/2010/main" val="675587242"/>
       </p:ext>
     </p:extLst>
   </p:cSld>
@@ -514,7 +295,6 @@
               <a:rPr lang="en-US" dirty="0"/>
               <a:t>[~25s] Hello everyone, we are Abhinav and Saksham. Our CSE413 project is about searching Hindi text. When you type a question into a search box, should the system find only documents that share your exact words, or documents that mean the same thing? We compared those two ideas on Hindi questions, using a classic keyword method called TF-IDF and a newer method built on sentence embeddings. In the next few minutes we will show what we measured, and what we can and cannot claim.</a:t>
             </a:r>
-            <a:endParaRPr lang="en-US" dirty="0"/>
           </a:p>
         </p:txBody>
       </p:sp>
@@ -602,7 +382,6 @@
               <a:rPr lang="en-US" dirty="0"/>
               <a:t>[~35s] Now a negative result. We expected the hybrid to combine the best of both, but it was significantly worse than E5 alone, by 0.118. It was worse on 13 queries, similar on 34, and better on only 3. Our hypothesis is that reciprocal rank fusion gives both methods an equal vote. A relevant document ranked 68th by BM25 but first by E5 scores 0.0242, below a non-relevant one ranked first and fifth, at 0.0318. We tested equal weights only, so this applies only to that scheme.</a:t>
             </a:r>
-            <a:endParaRPr lang="en-US" dirty="0"/>
           </a:p>
         </p:txBody>
       </p:sp>
@@ -690,7 +469,6 @@
               <a:rPr lang="en-US" dirty="0"/>
               <a:t>[~40s] To conclude. First, embeddings clearly beat TF-IDF and BM25 on this dataset. Second, the simple hybrid does not help, and the tokenizer bug is real, but its effect is not statistically clear. Third, several smaller differences cannot be resolved with only 50 queries. So we recommend using a multilingual embedding model alone, with MiniLM as a reasonable lighter choice. Our limits: one small dataset of short, machine-translated questions with incomplete labels. Future work: weighted fusion, a reranker, longer documents, English-to-Hindi search. Thank you.</a:t>
             </a:r>
-            <a:endParaRPr lang="en-US" dirty="0"/>
           </a:p>
         </p:txBody>
       </p:sp>
@@ -778,7 +556,6 @@
               <a:rPr lang="en-US" dirty="0"/>
               <a:t>[~35s] Here is the core idea. Keyword search matches words. If you ask why time passes so fast, it finds a question with the word samay, meaning time, and ranks it high. But a question that means the same, how quickly the days pass, shares no word, so it ranks low. Semantic search turns each sentence into an embedding, which is just a list of numbers that captures meaning, so the paraphrase lands close to the query. This example is only illustrative. Our research question is whether this helps for Hindi.</a:t>
             </a:r>
-            <a:endParaRPr lang="en-US" dirty="0"/>
           </a:p>
         </p:txBody>
       </p:sp>
@@ -866,7 +643,6 @@
               <a:rPr lang="en-US" dirty="0"/>
               <a:t>[~30s] Our data is a Hindi collection of Quora duplicate questions, meaning questions that ask the same thing in different words. The corpus has 5,046 questions, which is the pile we search through. We have 50 queries, and 70 relevance judgments, which are simple yes or no labels saying which documents are right answers. That is about 1.4 per query. We only cleaned the text. We also checked that no query matches itself, and that three queries with identical answers do not change the ranking of methods.</a:t>
             </a:r>
-            <a:endParaRPr lang="en-US" dirty="0"/>
           </a:p>
         </p:txBody>
       </p:sp>
@@ -954,7 +730,6 @@
               <a:rPr lang="en-US" dirty="0"/>
               <a:t>[~40s] This is our pipeline. A Hindi query and the 5,046 documents are normalised, then passed to six methods. Three are keyword methods: TF-IDF as in our midterm, TF-IDF with a fixed tokenizer, and BM25, a stronger keyword formula. Two are embedding models, MiniLM and multilingual E5, used as released with no fine-tuning. The sixth is a hybrid that merges BM25 and E5. Every method ranks all documents and keeps the top 100, using one shared scoring function. Then we compute metrics, confidence intervals, paired tests and an error analysis.</a:t>
             </a:r>
-            <a:endParaRPr lang="en-US" dirty="0"/>
           </a:p>
         </p:txBody>
       </p:sp>
@@ -1042,7 +817,6 @@
               <a:rPr lang="en-US" dirty="0"/>
               <a:t>[~35s] Before comparing, we audited our midterm baseline. A tokenizer splits text into words. The default one in scikit-learn cuts Hindi words at every vowel sign and joining mark, and drops one-letter pieces. So the word mastar becomes a single leftover fragment. Words with those marks are ninety percent of the corpus, and none of them survive intact. Fixing it grows the vocabulary from 1,556 to 6,172 terms. But honestly, the ranking gain is only plus 0.043, and the interval includes zero, so it is not statistically clear.</a:t>
             </a:r>
-            <a:endParaRPr lang="en-US" dirty="0"/>
           </a:p>
         </p:txBody>
       </p:sp>
@@ -1130,7 +904,6 @@
               <a:rPr lang="en-US" dirty="0"/>
               <a:t>[~35s] Here is how we score the results. Our main metric is nDCG at ten. It looks at the top ten results and gives full credit when the right document is first, less at second or third, as in this small table. We also report MRR and Recall at ten. With only 50 queries, luck matters, so we add bootstrap confidence intervals, paired comparisons, and a Bonferroni correction, which is a stricter test when you make many comparisons. Finally, our metric code matches the ranx library to six decimals.</a:t>
             </a:r>
-            <a:endParaRPr lang="en-US" dirty="0"/>
           </a:p>
         </p:txBody>
       </p:sp>
@@ -1218,7 +991,6 @@
               <a:rPr lang="en-US" dirty="0"/>
               <a:t>[~35s] This is our main result. Each bar is the average nDCG at ten, and the black line is the ninety-five percent confidence interval. The two keyword methods and our midterm baseline sit around 0.65 to 0.69. MiniLM reaches 0.845, and multilingual E5 reaches 0.893. So E5 scores 0.893, against 0.692 for the best TF-IDF and 0.658 for BM25. E5 is also best on MRR and Recall at ten. The hybrid lands in between, at 0.775, which we explain shortly.</a:t>
             </a:r>
-            <a:endParaRPr lang="en-US" dirty="0"/>
           </a:p>
         </p:txBody>
       </p:sp>
@@ -1306,7 +1078,6 @@
               <a:rPr lang="en-US" dirty="0"/>
               <a:t>[~40s] Bars can overlap by luck, so we tested the paired differences. Each dot is a difference between two methods, and a line is its interval. If the line does not cross zero, the difference is significant. MiniLM and E5 both beat BM25, and all four dark results survive the Bonferroni correction. The hybrid is significantly worse than E5. The grey ones are inconclusive. In particular, E5 is ahead of MiniLM numerically, but the interval includes zero, so we cannot claim E5 is better than MiniLM.</a:t>
             </a:r>
-            <a:endParaRPr lang="en-US" dirty="0"/>
           </a:p>
         </p:txBody>
       </p:sp>
@@ -1394,7 +1165,6 @@
               <a:rPr lang="en-US" dirty="0"/>
               <a:t>[~35s] Why do embeddings win? Comparing BM25 and E5 query by query, embeddings win on 21 queries, keyword search on only 2, both solve 24, and both struggle on 3. Sixteen queries are solved perfectly by every method. The table shows examples, giving the rank of the first relevant document. A spelling difference put it at rank 68 for BM25 but rank 1 for E5. Keyword search wins only on a generic question. Some hard cases come from translation inconsistencies in the dataset.</a:t>
             </a:r>
-            <a:endParaRPr lang="en-US" dirty="0"/>
           </a:p>
         </p:txBody>
       </p:sp>
@@ -1472,6 +1242,7 @@
         <a:solidFill>
           <a:srgbClr val="FFFFFF"/>
         </a:solidFill>
+        <a:effectLst/>
       </p:bgPr>
     </p:bg>
     <p:spTree>
@@ -1491,9 +1262,11 @@
       <p:sp>
         <p:nvSpPr>
           <p:cNvPr id="2" name="Text 0"/>
-          <p:cNvSpPr/>
+          <p:cNvSpPr>
+            <a:spLocks noGrp="1"/>
+          </p:cNvSpPr>
           <p:nvPr>
-            <p:ph idx="100" type="title" hasCustomPrompt="1"/>
+            <p:ph type="title" idx="100" hasCustomPrompt="1"/>
           </p:nvPr>
         </p:nvSpPr>
         <p:spPr>
@@ -1510,7 +1283,7 @@
         <p:txBody>
           <a:bodyPr wrap="square" rtlCol="0"/>
           <a:lstStyle>
-            <a:lvl1pPr algn="l" indent="0" marL="0">
+            <a:lvl1pPr marL="0" indent="0" algn="l">
               <a:buNone/>
               <a:defRPr lang="en-US" sz="2800" b="1" dirty="0">
                 <a:solidFill>
@@ -1523,7 +1296,7 @@
             </a:lvl1pPr>
           </a:lstStyle>
           <a:p>
-            <a:pPr algn="l" indent="0" marL="0">
+            <a:pPr marL="0" indent="0" algn="l">
               <a:buNone/>
             </a:pPr>
             <a:endParaRPr lang="en-US" sz="2800" dirty="0"/>
@@ -1574,7 +1347,7 @@
           <a:bodyPr wrap="square" lIns="0" tIns="0" rIns="0" bIns="0" rtlCol="0" anchor="ctr"/>
           <a:lstStyle/>
           <a:p>
-            <a:pPr algn="l" indent="0" marL="0">
+            <a:pPr marL="0" indent="0" algn="l">
               <a:buNone/>
             </a:pPr>
             <a:r>
@@ -1612,7 +1385,7 @@
           </a:prstGeom>
           <a:extLst>
             <a:ext uri="{C572A759-6A51-4108-AA02-DFA0A04FC94B}">
-              <ma14:wrappingTextBoxFlag xmlns:ma14="http://schemas.microsoft.com/office/mac/drawingml/2011/main" val="0"/>
+              <ma14:wrappingTextBoxFlag xmlns:ma14="http://schemas.microsoft.com/office/mac/drawingml/2011/main" xmlns="" val="0"/>
             </a:ext>
           </a:extLst>
         </p:spPr>
@@ -1633,8 +1406,8 @@
           <a:p>
             <a:pPr algn="r"/>
             <a:fld id="{F7021451-1387-4CA6-816F-3879F97B5CBC}" type="slidenum">
-              <a:rPr b="0" lang="en-US"/>
-              <a:t>1002</a:t>
+              <a:rPr lang="en-US" b="0"/>
+              <a:t>‹#›</a:t>
             </a:fld>
             <a:endParaRPr lang="en-US"/>
           </a:p>
@@ -1656,6 +1429,7 @@
         <a:solidFill>
           <a:srgbClr val="FFFFFF"/>
         </a:solidFill>
+        <a:effectLst/>
       </p:bgPr>
     </p:bg>
     <p:spTree>
@@ -1683,6 +1457,11 @@
 <file path=ppt/slideMasters/slideMaster1.xml><?xml version="1.0" encoding="utf-8"?>
 <p:sldMaster xmlns:a="http://schemas.openxmlformats.org/drawingml/2006/main" xmlns:r="http://schemas.openxmlformats.org/officeDocument/2006/relationships" xmlns:p="http://schemas.openxmlformats.org/presentationml/2006/main">
   <p:cSld>
+    <p:bg>
+      <p:bgRef idx="1001">
+        <a:schemeClr val="bg1"/>
+      </p:bgRef>
+    </p:bg>
     <p:spTree>
       <p:nvGrpSpPr>
         <p:cNvPr id="1" name=""/>
@@ -1717,7 +1496,7 @@
           </a:prstGeom>
           <a:extLst>
             <a:ext uri="{C572A759-6A51-4108-AA02-DFA0A04FC94B}">
-              <ma14:wrappingTextBoxFlag xmlns:ma14="http://schemas.microsoft.com/office/mac/drawingml/2011/main" val="0"/>
+              <ma14:wrappingTextBoxFlag xmlns:ma14="http://schemas.microsoft.com/office/mac/drawingml/2011/main" xmlns="" val="0"/>
             </a:ext>
           </a:extLst>
         </p:spPr>
@@ -1738,8 +1517,8 @@
           <a:p>
             <a:pPr algn="r"/>
             <a:fld id="{F7021451-1387-4CA6-816F-3879F97B5CBC}" type="slidenum">
-              <a:rPr b="0" lang="en-US"/>
-              <a:t>null</a:t>
+              <a:rPr lang="en-US" b="0"/>
+              <a:t>‹#›</a:t>
             </a:fld>
             <a:endParaRPr lang="en-US"/>
           </a:p>
@@ -2045,7 +1824,7 @@
           <a:bodyPr wrap="square" lIns="0" tIns="0" rIns="0" bIns="0" rtlCol="0" anchor="t"/>
           <a:lstStyle/>
           <a:p>
-            <a:pPr algn="l" indent="0" marL="0">
+            <a:pPr marL="0" indent="0" algn="l">
               <a:buNone/>
             </a:pPr>
             <a:r>
@@ -2059,6 +1838,11 @@
               </a:rPr>
               <a:t>Semantic Search for Hindi Documents using Sentence Embeddings</a:t>
             </a:r>
+          </a:p>
+          <a:p>
+            <a:pPr marL="0" indent="0" algn="l">
+              <a:buNone/>
+            </a:pPr>
             <a:endParaRPr lang="en-US" sz="3000" dirty="0"/>
           </a:p>
         </p:txBody>
@@ -2084,7 +1868,7 @@
           <a:bodyPr wrap="square" lIns="0" tIns="0" rIns="0" bIns="0" rtlCol="0" anchor="t"/>
           <a:lstStyle/>
           <a:p>
-            <a:pPr algn="l" indent="0" marL="0">
+            <a:pPr marL="0" indent="0" algn="l">
               <a:buNone/>
             </a:pPr>
             <a:r>
@@ -2124,6 +1908,13 @@
             <a:prstDash val="solid"/>
           </a:ln>
         </p:spPr>
+        <p:txBody>
+          <a:bodyPr/>
+          <a:lstStyle/>
+          <a:p>
+            <a:endParaRPr lang="en-US"/>
+          </a:p>
+        </p:txBody>
       </p:sp>
       <p:sp>
         <p:nvSpPr>
@@ -2134,7 +1925,7 @@
         <p:spPr>
           <a:xfrm>
             <a:off x="548640" y="3108960"/>
-            <a:ext cx="8046720" cy="640080"/>
+            <a:ext cx="8046720" cy="1051560"/>
           </a:xfrm>
           <a:prstGeom prst="rect">
             <a:avLst/>
@@ -2146,7 +1937,7 @@
           <a:bodyPr wrap="square" lIns="0" tIns="0" rIns="0" bIns="0" rtlCol="0" anchor="t"/>
           <a:lstStyle/>
           <a:p>
-            <a:pPr algn="l" indent="0" marL="0">
+            <a:pPr marL="0" indent="0" algn="l">
               <a:spcAft>
                 <a:spcPts val="200"/>
               </a:spcAft>
@@ -2161,12 +1952,11 @@
                 <a:ea typeface="Calibri" pitchFamily="34" charset="-122"/>
                 <a:cs typeface="Calibri" pitchFamily="34" charset="-120"/>
               </a:rPr>
-              <a:t>Abhinav Marlingaplar (2023BCD0013)</a:t>
-            </a:r>
-            <a:endParaRPr lang="en-US" sz="1600" dirty="0"/>
-          </a:p>
-          <a:p>
-            <a:pPr algn="l" indent="0" marL="0">
+              <a:t>Team Number 8:</a:t>
+            </a:r>
+          </a:p>
+          <a:p>
+            <a:pPr marL="0" indent="0" algn="l">
               <a:spcAft>
                 <a:spcPts val="200"/>
               </a:spcAft>
@@ -2181,34 +1971,12 @@
                 <a:ea typeface="Calibri" pitchFamily="34" charset="-122"/>
                 <a:cs typeface="Calibri" pitchFamily="34" charset="-120"/>
               </a:rPr>
-              <a:t>Saksham Saklani (2023BCD0049)</a:t>
+              <a:t>Abhinav Marlingaplar (2023BCD0013)</a:t>
             </a:r>
             <a:endParaRPr lang="en-US" sz="1600" dirty="0"/>
           </a:p>
-        </p:txBody>
-      </p:sp>
-      <p:sp>
-        <p:nvSpPr>
-          <p:cNvPr id="7" name="Text 4"/>
-          <p:cNvSpPr txBox="1"/>
-          <p:nvPr/>
-        </p:nvSpPr>
-        <p:spPr>
-          <a:xfrm>
-            <a:off x="548640" y="3840480"/>
-            <a:ext cx="8046720" cy="640080"/>
-          </a:xfrm>
-          <a:prstGeom prst="rect">
-            <a:avLst/>
-          </a:prstGeom>
-          <a:noFill/>
-          <a:ln/>
-        </p:spPr>
-        <p:txBody>
-          <a:bodyPr wrap="square" lIns="0" tIns="0" rIns="0" bIns="0" rtlCol="0" anchor="t"/>
-          <a:lstStyle/>
-          <a:p>
-            <a:pPr algn="l" indent="0" marL="0">
+          <a:p>
+            <a:pPr marL="0" indent="0" algn="l">
               <a:spcAft>
                 <a:spcPts val="200"/>
               </a:spcAft>
@@ -2217,6 +1985,48 @@
             <a:r>
               <a:rPr lang="en-US" sz="1600" dirty="0">
                 <a:solidFill>
+                  <a:srgbClr val="1A1A1A"/>
+                </a:solidFill>
+                <a:latin typeface="Calibri" pitchFamily="34" charset="0"/>
+                <a:ea typeface="Calibri" pitchFamily="34" charset="-122"/>
+                <a:cs typeface="Calibri" pitchFamily="34" charset="-120"/>
+              </a:rPr>
+              <a:t>Saksham Saklani (2023BCD0049)</a:t>
+            </a:r>
+            <a:endParaRPr lang="en-US" sz="1600" dirty="0"/>
+          </a:p>
+        </p:txBody>
+      </p:sp>
+      <p:sp>
+        <p:nvSpPr>
+          <p:cNvPr id="7" name="Text 4"/>
+          <p:cNvSpPr txBox="1"/>
+          <p:nvPr/>
+        </p:nvSpPr>
+        <p:spPr>
+          <a:xfrm>
+            <a:off x="548640" y="4160520"/>
+            <a:ext cx="8046720" cy="640080"/>
+          </a:xfrm>
+          <a:prstGeom prst="rect">
+            <a:avLst/>
+          </a:prstGeom>
+          <a:noFill/>
+          <a:ln/>
+        </p:spPr>
+        <p:txBody>
+          <a:bodyPr wrap="square" lIns="0" tIns="0" rIns="0" bIns="0" rtlCol="0" anchor="t"/>
+          <a:lstStyle/>
+          <a:p>
+            <a:pPr marL="0" indent="0" algn="l">
+              <a:spcAft>
+                <a:spcPts val="200"/>
+              </a:spcAft>
+              <a:buNone/>
+            </a:pPr>
+            <a:r>
+              <a:rPr lang="en-US" sz="1600" dirty="0">
+                <a:solidFill>
                   <a:srgbClr val="6C7A89"/>
                 </a:solidFill>
                 <a:latin typeface="Calibri" pitchFamily="34" charset="0"/>
@@ -2228,7 +2038,7 @@
             <a:endParaRPr lang="en-US" sz="1600" dirty="0"/>
           </a:p>
           <a:p>
-            <a:pPr algn="l" indent="0" marL="0">
+            <a:pPr marL="0" indent="0" algn="l">
               <a:spcAft>
                 <a:spcPts val="200"/>
               </a:spcAft>
@@ -2277,9 +2087,11 @@
       <p:sp>
         <p:nvSpPr>
           <p:cNvPr id="2" name="Text 0"/>
-          <p:cNvSpPr/>
+          <p:cNvSpPr>
+            <a:spLocks noGrp="1"/>
+          </p:cNvSpPr>
           <p:nvPr>
-            <p:ph idx="100" type="title" hasCustomPrompt="1"/>
+            <p:ph type="title" idx="100" hasCustomPrompt="1"/>
           </p:nvPr>
         </p:nvSpPr>
         <p:spPr>
@@ -2297,7 +2109,7 @@
           <a:bodyPr wrap="square" lIns="0" tIns="0" rIns="0" bIns="0" rtlCol="0" anchor="ctr"/>
           <a:lstStyle/>
           <a:p>
-            <a:pPr algn="l" indent="0" marL="0">
+            <a:pPr marL="0" indent="0" algn="l">
               <a:buNone/>
             </a:pPr>
             <a:r>
@@ -2336,7 +2148,7 @@
           <a:bodyPr wrap="square" lIns="0" tIns="0" rIns="0" bIns="0" rtlCol="0" anchor="ctr"/>
           <a:lstStyle/>
           <a:p>
-            <a:pPr algn="l" indent="0" marL="0">
+            <a:pPr marL="0" indent="0" algn="l">
               <a:buNone/>
             </a:pPr>
             <a:r>
@@ -2375,7 +2187,7 @@
           <a:bodyPr wrap="square" lIns="0" tIns="0" rIns="0" bIns="0" rtlCol="0" anchor="t"/>
           <a:lstStyle/>
           <a:p>
-            <a:pPr algn="l" indent="0" marL="0">
+            <a:pPr marL="0" indent="0" algn="l">
               <a:buNone/>
             </a:pPr>
             <a:r>
@@ -2417,6 +2229,13 @@
             <a:prstDash val="solid"/>
           </a:ln>
         </p:spPr>
+        <p:txBody>
+          <a:bodyPr/>
+          <a:lstStyle/>
+          <a:p>
+            <a:endParaRPr lang="en-US"/>
+          </a:p>
+        </p:txBody>
       </p:sp>
       <p:sp>
         <p:nvSpPr>
@@ -2442,6 +2261,13 @@
             <a:prstDash val="solid"/>
           </a:ln>
         </p:spPr>
+        <p:txBody>
+          <a:bodyPr/>
+          <a:lstStyle/>
+          <a:p>
+            <a:endParaRPr lang="en-US"/>
+          </a:p>
+        </p:txBody>
       </p:sp>
       <p:sp>
         <p:nvSpPr>
@@ -2467,6 +2293,13 @@
             <a:prstDash val="solid"/>
           </a:ln>
         </p:spPr>
+        <p:txBody>
+          <a:bodyPr/>
+          <a:lstStyle/>
+          <a:p>
+            <a:endParaRPr lang="en-US"/>
+          </a:p>
+        </p:txBody>
       </p:sp>
       <p:sp>
         <p:nvSpPr>
@@ -2489,7 +2322,7 @@
           <a:bodyPr wrap="square" lIns="0" tIns="0" rIns="0" bIns="0" rtlCol="0" anchor="t"/>
           <a:lstStyle/>
           <a:p>
-            <a:pPr algn="l" indent="0" marL="0">
+            <a:pPr marL="0" indent="0" algn="l">
               <a:buNone/>
             </a:pPr>
             <a:r>
@@ -2503,9 +2336,6 @@
               </a:rPr>
               <a:t>13</a:t>
             </a:r>
-            <a:pPr algn="l" indent="0" marL="0">
-              <a:buNone/>
-            </a:pPr>
             <a:r>
               <a:rPr lang="en-US" sz="1400" dirty="0">
                 <a:solidFill>
@@ -2517,9 +2347,6 @@
               </a:rPr>
               <a:t> worse   </a:t>
             </a:r>
-            <a:pPr algn="l" indent="0" marL="0">
-              <a:buNone/>
-            </a:pPr>
             <a:r>
               <a:rPr lang="en-US" sz="1400" b="1" dirty="0">
                 <a:solidFill>
@@ -2531,9 +2358,6 @@
               </a:rPr>
               <a:t>34</a:t>
             </a:r>
-            <a:pPr algn="l" indent="0" marL="0">
-              <a:buNone/>
-            </a:pPr>
             <a:r>
               <a:rPr lang="en-US" sz="1400" dirty="0">
                 <a:solidFill>
@@ -2545,9 +2369,6 @@
               </a:rPr>
               <a:t> similar   </a:t>
             </a:r>
-            <a:pPr algn="l" indent="0" marL="0">
-              <a:buNone/>
-            </a:pPr>
             <a:r>
               <a:rPr lang="en-US" sz="1400" b="1" dirty="0">
                 <a:solidFill>
@@ -2559,9 +2380,6 @@
               </a:rPr>
               <a:t>3</a:t>
             </a:r>
-            <a:pPr algn="l" indent="0" marL="0">
-              <a:buNone/>
-            </a:pPr>
             <a:r>
               <a:rPr lang="en-US" sz="1400" dirty="0">
                 <a:solidFill>
@@ -2598,7 +2416,7 @@
           <a:bodyPr wrap="square" lIns="0" tIns="0" rIns="0" bIns="0" rtlCol="0" anchor="t"/>
           <a:lstStyle/>
           <a:p>
-            <a:pPr algn="l" indent="0" marL="0">
+            <a:pPr marL="0" indent="0" algn="l">
               <a:buNone/>
             </a:pPr>
             <a:r>
@@ -2638,6 +2456,13 @@
             <a:prstDash val="solid"/>
           </a:ln>
         </p:spPr>
+        <p:txBody>
+          <a:bodyPr/>
+          <a:lstStyle/>
+          <a:p>
+            <a:endParaRPr lang="en-US"/>
+          </a:p>
+        </p:txBody>
       </p:sp>
       <p:sp>
         <p:nvSpPr>
@@ -2660,7 +2485,7 @@
           <a:bodyPr wrap="square" lIns="0" tIns="0" rIns="0" bIns="0" rtlCol="0" anchor="t"/>
           <a:lstStyle/>
           <a:p>
-            <a:pPr algn="l" indent="0" marL="0">
+            <a:pPr marL="0" indent="0" algn="l">
               <a:buNone/>
             </a:pPr>
             <a:r>
@@ -2674,9 +2499,6 @@
               </a:rPr>
               <a:t>Hypothesis: </a:t>
             </a:r>
-            <a:pPr algn="l" indent="0" marL="0">
-              <a:buNone/>
-            </a:pPr>
             <a:r>
               <a:rPr lang="en-US" sz="1600" dirty="0">
                 <a:solidFill>
@@ -2694,7 +2516,7 @@
       </p:sp>
       <p:graphicFrame>
         <p:nvGraphicFramePr>
-          <p:cNvPr id="11" name="Table 0"/>
+          <p:cNvPr id="3" name="Table 0"/>
           <p:cNvGraphicFramePr>
             <a:graphicFrameLocks noGrp="1"/>
           </p:cNvGraphicFramePr>
@@ -2715,10 +2537,34 @@
             <a:tbl>
               <a:tblPr/>
               <a:tblGrid>
-                <a:gridCol w="1051560"/>
-                <a:gridCol w="594360"/>
-                <a:gridCol w="594360"/>
-                <a:gridCol w="1965960"/>
+                <a:gridCol w="1051560">
+                  <a:extLst>
+                    <a:ext uri="{9D8B030D-6E8A-4147-A177-3AD203B41FA5}">
+                      <a16:colId xmlns:a16="http://schemas.microsoft.com/office/drawing/2014/main" val="20000"/>
+                    </a:ext>
+                  </a:extLst>
+                </a:gridCol>
+                <a:gridCol w="594360">
+                  <a:extLst>
+                    <a:ext uri="{9D8B030D-6E8A-4147-A177-3AD203B41FA5}">
+                      <a16:colId xmlns:a16="http://schemas.microsoft.com/office/drawing/2014/main" val="20001"/>
+                    </a:ext>
+                  </a:extLst>
+                </a:gridCol>
+                <a:gridCol w="594360">
+                  <a:extLst>
+                    <a:ext uri="{9D8B030D-6E8A-4147-A177-3AD203B41FA5}">
+                      <a16:colId xmlns:a16="http://schemas.microsoft.com/office/drawing/2014/main" val="20002"/>
+                    </a:ext>
+                  </a:extLst>
+                </a:gridCol>
+                <a:gridCol w="1965960">
+                  <a:extLst>
+                    <a:ext uri="{9D8B030D-6E8A-4147-A177-3AD203B41FA5}">
+                      <a16:colId xmlns:a16="http://schemas.microsoft.com/office/drawing/2014/main" val="20003"/>
+                    </a:ext>
+                  </a:extLst>
+                </a:gridCol>
               </a:tblGrid>
               <a:tr h="365760">
                 <a:tc>
@@ -2726,7 +2572,7 @@
                     <a:bodyPr/>
                     <a:lstStyle/>
                     <a:p>
-                      <a:pPr indent="0" marL="0">
+                      <a:pPr marL="0" indent="0">
                         <a:buNone/>
                       </a:pPr>
                       <a:r>
@@ -2773,7 +2619,7 @@
                     <a:bodyPr/>
                     <a:lstStyle/>
                     <a:p>
-                      <a:pPr algn="ctr" indent="0" marL="0">
+                      <a:pPr marL="0" indent="0" algn="ctr">
                         <a:buNone/>
                       </a:pPr>
                       <a:r>
@@ -2820,7 +2666,7 @@
                     <a:bodyPr/>
                     <a:lstStyle/>
                     <a:p>
-                      <a:pPr algn="ctr" indent="0" marL="0">
+                      <a:pPr marL="0" indent="0" algn="ctr">
                         <a:buNone/>
                       </a:pPr>
                       <a:r>
@@ -2867,7 +2713,7 @@
                     <a:bodyPr/>
                     <a:lstStyle/>
                     <a:p>
-                      <a:pPr indent="0" marL="0">
+                      <a:pPr marL="0" indent="0">
                         <a:buNone/>
                       </a:pPr>
                       <a:r>
@@ -2909,6 +2755,11 @@
                     </a:lnB>
                   </a:tcPr>
                 </a:tc>
+                <a:extLst>
+                  <a:ext uri="{0D108BD9-81ED-4DB2-BD59-A6C34878D82A}">
+                    <a16:rowId xmlns:a16="http://schemas.microsoft.com/office/drawing/2014/main" val="10000"/>
+                  </a:ext>
+                </a:extLst>
               </a:tr>
               <a:tr h="365760">
                 <a:tc>
@@ -2916,7 +2767,7 @@
                     <a:bodyPr/>
                     <a:lstStyle/>
                     <a:p>
-                      <a:pPr indent="0" marL="0">
+                      <a:pPr marL="0" indent="0">
                         <a:buNone/>
                       </a:pPr>
                       <a:r>
@@ -2944,8 +2795,14 @@
                     <a:lnR w="0" cap="flat" cmpd="sng" algn="ctr">
                       <a:noFill/>
                     </a:lnR>
-                    <a:lnT w="0" cap="flat" cmpd="sng" algn="ctr">
-                      <a:noFill/>
+                    <a:lnT w="12700" cap="flat" cmpd="sng" algn="ctr">
+                      <a:solidFill>
+                        <a:srgbClr val="1A1A1A"/>
+                      </a:solidFill>
+                      <a:prstDash val="solid"/>
+                      <a:round/>
+                      <a:headEnd type="none" w="med" len="med"/>
+                      <a:tailEnd type="none" w="med" len="med"/>
                     </a:lnT>
                     <a:lnB w="9525" cap="flat" cmpd="sng" algn="ctr">
                       <a:solidFill>
@@ -2963,7 +2820,7 @@
                     <a:bodyPr/>
                     <a:lstStyle/>
                     <a:p>
-                      <a:pPr algn="ctr" indent="0" marL="0">
+                      <a:pPr marL="0" indent="0" algn="ctr">
                         <a:buNone/>
                       </a:pPr>
                       <a:r>
@@ -2991,8 +2848,14 @@
                     <a:lnR w="0" cap="flat" cmpd="sng" algn="ctr">
                       <a:noFill/>
                     </a:lnR>
-                    <a:lnT w="0" cap="flat" cmpd="sng" algn="ctr">
-                      <a:noFill/>
+                    <a:lnT w="12700" cap="flat" cmpd="sng" algn="ctr">
+                      <a:solidFill>
+                        <a:srgbClr val="1A1A1A"/>
+                      </a:solidFill>
+                      <a:prstDash val="solid"/>
+                      <a:round/>
+                      <a:headEnd type="none" w="med" len="med"/>
+                      <a:tailEnd type="none" w="med" len="med"/>
                     </a:lnT>
                     <a:lnB w="9525" cap="flat" cmpd="sng" algn="ctr">
                       <a:solidFill>
@@ -3010,7 +2873,7 @@
                     <a:bodyPr/>
                     <a:lstStyle/>
                     <a:p>
-                      <a:pPr algn="ctr" indent="0" marL="0">
+                      <a:pPr marL="0" indent="0" algn="ctr">
                         <a:buNone/>
                       </a:pPr>
                       <a:r>
@@ -3038,8 +2901,14 @@
                     <a:lnR w="0" cap="flat" cmpd="sng" algn="ctr">
                       <a:noFill/>
                     </a:lnR>
-                    <a:lnT w="0" cap="flat" cmpd="sng" algn="ctr">
-                      <a:noFill/>
+                    <a:lnT w="12700" cap="flat" cmpd="sng" algn="ctr">
+                      <a:solidFill>
+                        <a:srgbClr val="1A1A1A"/>
+                      </a:solidFill>
+                      <a:prstDash val="solid"/>
+                      <a:round/>
+                      <a:headEnd type="none" w="med" len="med"/>
+                      <a:tailEnd type="none" w="med" len="med"/>
                     </a:lnT>
                     <a:lnB w="9525" cap="flat" cmpd="sng" algn="ctr">
                       <a:solidFill>
@@ -3057,7 +2926,7 @@
                     <a:bodyPr/>
                     <a:lstStyle/>
                     <a:p>
-                      <a:pPr indent="0" marL="0">
+                      <a:pPr marL="0" indent="0">
                         <a:buNone/>
                       </a:pPr>
                       <a:r>
@@ -3085,8 +2954,14 @@
                     <a:lnR w="0" cap="flat" cmpd="sng" algn="ctr">
                       <a:noFill/>
                     </a:lnR>
-                    <a:lnT w="0" cap="flat" cmpd="sng" algn="ctr">
-                      <a:noFill/>
+                    <a:lnT w="12700" cap="flat" cmpd="sng" algn="ctr">
+                      <a:solidFill>
+                        <a:srgbClr val="1A1A1A"/>
+                      </a:solidFill>
+                      <a:prstDash val="solid"/>
+                      <a:round/>
+                      <a:headEnd type="none" w="med" len="med"/>
+                      <a:tailEnd type="none" w="med" len="med"/>
                     </a:lnT>
                     <a:lnB w="9525" cap="flat" cmpd="sng" algn="ctr">
                       <a:solidFill>
@@ -3099,6 +2974,11 @@
                     </a:lnB>
                   </a:tcPr>
                 </a:tc>
+                <a:extLst>
+                  <a:ext uri="{0D108BD9-81ED-4DB2-BD59-A6C34878D82A}">
+                    <a16:rowId xmlns:a16="http://schemas.microsoft.com/office/drawing/2014/main" val="10001"/>
+                  </a:ext>
+                </a:extLst>
               </a:tr>
               <a:tr h="365760">
                 <a:tc>
@@ -3106,7 +2986,7 @@
                     <a:bodyPr/>
                     <a:lstStyle/>
                     <a:p>
-                      <a:pPr indent="0" marL="0">
+                      <a:pPr marL="0" indent="0">
                         <a:buNone/>
                       </a:pPr>
                       <a:r>
@@ -3134,8 +3014,14 @@
                     <a:lnR w="0" cap="flat" cmpd="sng" algn="ctr">
                       <a:noFill/>
                     </a:lnR>
-                    <a:lnT w="0" cap="flat" cmpd="sng" algn="ctr">
-                      <a:noFill/>
+                    <a:lnT w="9525" cap="flat" cmpd="sng" algn="ctr">
+                      <a:solidFill>
+                        <a:srgbClr val="C3C9D0"/>
+                      </a:solidFill>
+                      <a:prstDash val="solid"/>
+                      <a:round/>
+                      <a:headEnd type="none" w="med" len="med"/>
+                      <a:tailEnd type="none" w="med" len="med"/>
                     </a:lnT>
                     <a:lnB w="9525" cap="flat" cmpd="sng" algn="ctr">
                       <a:solidFill>
@@ -3153,7 +3039,7 @@
                     <a:bodyPr/>
                     <a:lstStyle/>
                     <a:p>
-                      <a:pPr algn="ctr" indent="0" marL="0">
+                      <a:pPr marL="0" indent="0" algn="ctr">
                         <a:buNone/>
                       </a:pPr>
                       <a:r>
@@ -3181,8 +3067,14 @@
                     <a:lnR w="0" cap="flat" cmpd="sng" algn="ctr">
                       <a:noFill/>
                     </a:lnR>
-                    <a:lnT w="0" cap="flat" cmpd="sng" algn="ctr">
-                      <a:noFill/>
+                    <a:lnT w="9525" cap="flat" cmpd="sng" algn="ctr">
+                      <a:solidFill>
+                        <a:srgbClr val="C3C9D0"/>
+                      </a:solidFill>
+                      <a:prstDash val="solid"/>
+                      <a:round/>
+                      <a:headEnd type="none" w="med" len="med"/>
+                      <a:tailEnd type="none" w="med" len="med"/>
                     </a:lnT>
                     <a:lnB w="9525" cap="flat" cmpd="sng" algn="ctr">
                       <a:solidFill>
@@ -3200,7 +3092,7 @@
                     <a:bodyPr/>
                     <a:lstStyle/>
                     <a:p>
-                      <a:pPr algn="ctr" indent="0" marL="0">
+                      <a:pPr marL="0" indent="0" algn="ctr">
                         <a:buNone/>
                       </a:pPr>
                       <a:r>
@@ -3228,8 +3120,14 @@
                     <a:lnR w="0" cap="flat" cmpd="sng" algn="ctr">
                       <a:noFill/>
                     </a:lnR>
-                    <a:lnT w="0" cap="flat" cmpd="sng" algn="ctr">
-                      <a:noFill/>
+                    <a:lnT w="9525" cap="flat" cmpd="sng" algn="ctr">
+                      <a:solidFill>
+                        <a:srgbClr val="C3C9D0"/>
+                      </a:solidFill>
+                      <a:prstDash val="solid"/>
+                      <a:round/>
+                      <a:headEnd type="none" w="med" len="med"/>
+                      <a:tailEnd type="none" w="med" len="med"/>
                     </a:lnT>
                     <a:lnB w="9525" cap="flat" cmpd="sng" algn="ctr">
                       <a:solidFill>
@@ -3247,7 +3145,7 @@
                     <a:bodyPr/>
                     <a:lstStyle/>
                     <a:p>
-                      <a:pPr indent="0" marL="0">
+                      <a:pPr marL="0" indent="0">
                         <a:buNone/>
                       </a:pPr>
                       <a:r>
@@ -3275,8 +3173,14 @@
                     <a:lnR w="0" cap="flat" cmpd="sng" algn="ctr">
                       <a:noFill/>
                     </a:lnR>
-                    <a:lnT w="0" cap="flat" cmpd="sng" algn="ctr">
-                      <a:noFill/>
+                    <a:lnT w="9525" cap="flat" cmpd="sng" algn="ctr">
+                      <a:solidFill>
+                        <a:srgbClr val="C3C9D0"/>
+                      </a:solidFill>
+                      <a:prstDash val="solid"/>
+                      <a:round/>
+                      <a:headEnd type="none" w="med" len="med"/>
+                      <a:tailEnd type="none" w="med" len="med"/>
                     </a:lnT>
                     <a:lnB w="9525" cap="flat" cmpd="sng" algn="ctr">
                       <a:solidFill>
@@ -3289,6 +3193,11 @@
                     </a:lnB>
                   </a:tcPr>
                 </a:tc>
+                <a:extLst>
+                  <a:ext uri="{0D108BD9-81ED-4DB2-BD59-A6C34878D82A}">
+                    <a16:rowId xmlns:a16="http://schemas.microsoft.com/office/drawing/2014/main" val="10002"/>
+                  </a:ext>
+                </a:extLst>
               </a:tr>
             </a:tbl>
           </a:graphicData>
@@ -3315,7 +3224,7 @@
           <a:bodyPr wrap="square" lIns="0" tIns="0" rIns="0" bIns="0" rtlCol="0" anchor="t"/>
           <a:lstStyle/>
           <a:p>
-            <a:pPr algn="l" indent="0" marL="0">
+            <a:pPr marL="0" indent="0" algn="l">
               <a:buNone/>
             </a:pPr>
             <a:r>
@@ -3354,7 +3263,7 @@
           <a:bodyPr wrap="square" lIns="0" tIns="0" rIns="0" bIns="0" rtlCol="0" anchor="t"/>
           <a:lstStyle/>
           <a:p>
-            <a:pPr algn="l" indent="0" marL="0">
+            <a:pPr marL="0" indent="0" algn="l">
               <a:buNone/>
             </a:pPr>
             <a:r>
@@ -3392,7 +3301,7 @@
           </a:prstGeom>
           <a:extLst>
             <a:ext uri="{C572A759-6A51-4108-AA02-DFA0A04FC94B}">
-              <ma14:wrappingTextBoxFlag xmlns:ma14="http://schemas.microsoft.com/office/mac/drawingml/2011/main" val="0"/>
+              <ma14:wrappingTextBoxFlag xmlns:ma14="http://schemas.microsoft.com/office/mac/drawingml/2011/main" xmlns="" val="0"/>
             </a:ext>
           </a:extLst>
         </p:spPr>
@@ -3413,7 +3322,7 @@
           <a:p>
             <a:pPr algn="r"/>
             <a:fld id="{F7021451-1387-4CA6-816F-3879F97B5CBC}" type="slidenum">
-              <a:rPr b="0" lang="en-US"/>
+              <a:rPr lang="en-US" b="0"/>
               <a:t>10</a:t>
             </a:fld>
             <a:endParaRPr lang="en-US"/>
@@ -3448,9 +3357,11 @@
       <p:sp>
         <p:nvSpPr>
           <p:cNvPr id="2" name="Text 0"/>
-          <p:cNvSpPr/>
+          <p:cNvSpPr>
+            <a:spLocks noGrp="1"/>
+          </p:cNvSpPr>
           <p:nvPr>
-            <p:ph idx="100" type="title" hasCustomPrompt="1"/>
+            <p:ph type="title" idx="100" hasCustomPrompt="1"/>
           </p:nvPr>
         </p:nvSpPr>
         <p:spPr>
@@ -3468,7 +3379,7 @@
           <a:bodyPr wrap="square" lIns="0" tIns="0" rIns="0" bIns="0" rtlCol="0" anchor="ctr"/>
           <a:lstStyle/>
           <a:p>
-            <a:pPr algn="l" indent="0" marL="0">
+            <a:pPr marL="0" indent="0" algn="l">
               <a:buNone/>
             </a:pPr>
             <a:r>
@@ -3507,7 +3418,7 @@
           <a:bodyPr wrap="square" lIns="0" tIns="0" rIns="0" bIns="0" rtlCol="0" anchor="t"/>
           <a:lstStyle/>
           <a:p>
-            <a:pPr algn="l" indent="0" marL="0">
+            <a:pPr marL="0" indent="0" algn="l">
               <a:buNone/>
             </a:pPr>
             <a:r>
@@ -3546,7 +3457,7 @@
           <a:bodyPr wrap="square" lIns="0" tIns="0" rIns="0" bIns="0" rtlCol="0" anchor="t"/>
           <a:lstStyle/>
           <a:p>
-            <a:pPr algn="l" indent="0" marL="0">
+            <a:pPr marL="0" indent="0" algn="l">
               <a:buNone/>
             </a:pPr>
             <a:r>
@@ -3585,7 +3496,7 @@
           <a:bodyPr wrap="square" lIns="0" tIns="0" rIns="0" bIns="0" rtlCol="0" anchor="t"/>
           <a:lstStyle/>
           <a:p>
-            <a:pPr algn="l" indent="0" marL="0">
+            <a:pPr marL="0" indent="0" algn="l">
               <a:buNone/>
             </a:pPr>
             <a:r>
@@ -3624,7 +3535,7 @@
           <a:bodyPr wrap="square" lIns="0" tIns="0" rIns="0" bIns="0" rtlCol="0" anchor="t"/>
           <a:lstStyle/>
           <a:p>
-            <a:pPr algn="l" indent="0" marL="0">
+            <a:pPr marL="0" indent="0" algn="l">
               <a:buNone/>
             </a:pPr>
             <a:r>
@@ -3663,7 +3574,7 @@
           <a:bodyPr wrap="square" lIns="0" tIns="0" rIns="0" bIns="0" rtlCol="0" anchor="t"/>
           <a:lstStyle/>
           <a:p>
-            <a:pPr algn="l" indent="0" marL="0">
+            <a:pPr marL="0" indent="0" algn="l">
               <a:buNone/>
             </a:pPr>
             <a:r>
@@ -3702,7 +3613,7 @@
           <a:bodyPr wrap="square" lIns="0" tIns="0" rIns="0" bIns="0" rtlCol="0" anchor="t"/>
           <a:lstStyle/>
           <a:p>
-            <a:pPr algn="l" indent="0" marL="0">
+            <a:pPr marL="0" indent="0" algn="l">
               <a:buNone/>
             </a:pPr>
             <a:r>
@@ -3742,6 +3653,13 @@
             <a:prstDash val="solid"/>
           </a:ln>
         </p:spPr>
+        <p:txBody>
+          <a:bodyPr/>
+          <a:lstStyle/>
+          <a:p>
+            <a:endParaRPr lang="en-US"/>
+          </a:p>
+        </p:txBody>
       </p:sp>
       <p:sp>
         <p:nvSpPr>
@@ -3764,7 +3682,7 @@
           <a:bodyPr wrap="square" lIns="0" tIns="0" rIns="0" bIns="0" rtlCol="0" anchor="t"/>
           <a:lstStyle/>
           <a:p>
-            <a:pPr algn="l" indent="0" marL="0">
+            <a:pPr marL="0" indent="0" algn="l">
               <a:buNone/>
             </a:pPr>
             <a:r>
@@ -3778,9 +3696,6 @@
               </a:rPr>
               <a:t>Recommendation: </a:t>
             </a:r>
-            <a:pPr algn="l" indent="0" marL="0">
-              <a:buNone/>
-            </a:pPr>
             <a:r>
               <a:rPr lang="en-US" sz="1600" dirty="0">
                 <a:solidFill>
@@ -3817,7 +3732,7 @@
           <a:bodyPr wrap="square" lIns="0" tIns="0" rIns="0" bIns="0" rtlCol="0" anchor="t"/>
           <a:lstStyle/>
           <a:p>
-            <a:pPr algn="l" indent="0" marL="0">
+            <a:pPr marL="0" indent="0" algn="l">
               <a:buNone/>
             </a:pPr>
             <a:r>
@@ -3831,9 +3746,6 @@
               </a:rPr>
               <a:t>Limitations: </a:t>
             </a:r>
-            <a:pPr algn="l" indent="0" marL="0">
-              <a:buNone/>
-            </a:pPr>
             <a:r>
               <a:rPr lang="en-US" sz="1400" dirty="0">
                 <a:solidFill>
@@ -3870,7 +3782,7 @@
           <a:bodyPr wrap="square" lIns="0" tIns="0" rIns="0" bIns="0" rtlCol="0" anchor="t"/>
           <a:lstStyle/>
           <a:p>
-            <a:pPr algn="l" indent="0" marL="0">
+            <a:pPr marL="0" indent="0" algn="l">
               <a:buNone/>
             </a:pPr>
             <a:r>
@@ -3884,9 +3796,6 @@
               </a:rPr>
               <a:t>Future work: </a:t>
             </a:r>
-            <a:pPr algn="l" indent="0" marL="0">
-              <a:buNone/>
-            </a:pPr>
             <a:r>
               <a:rPr lang="en-US" sz="1400" dirty="0">
                 <a:solidFill>
@@ -3923,7 +3832,7 @@
           <a:bodyPr wrap="square" lIns="0" tIns="0" rIns="0" bIns="0" rtlCol="0" anchor="ctr"/>
           <a:lstStyle/>
           <a:p>
-            <a:pPr algn="l" indent="0" marL="0">
+            <a:pPr marL="0" indent="0" algn="l">
               <a:buNone/>
             </a:pPr>
             <a:r>
@@ -3961,7 +3870,7 @@
           </a:prstGeom>
           <a:extLst>
             <a:ext uri="{C572A759-6A51-4108-AA02-DFA0A04FC94B}">
-              <ma14:wrappingTextBoxFlag xmlns:ma14="http://schemas.microsoft.com/office/mac/drawingml/2011/main" val="0"/>
+              <ma14:wrappingTextBoxFlag xmlns:ma14="http://schemas.microsoft.com/office/mac/drawingml/2011/main" xmlns="" val="0"/>
             </a:ext>
           </a:extLst>
         </p:spPr>
@@ -3982,7 +3891,7 @@
           <a:p>
             <a:pPr algn="r"/>
             <a:fld id="{F7021451-1387-4CA6-816F-3879F97B5CBC}" type="slidenum">
-              <a:rPr b="0" lang="en-US"/>
+              <a:rPr lang="en-US" b="0"/>
               <a:t>11</a:t>
             </a:fld>
             <a:endParaRPr lang="en-US"/>
@@ -4017,9 +3926,11 @@
       <p:sp>
         <p:nvSpPr>
           <p:cNvPr id="2" name="Text 0"/>
-          <p:cNvSpPr/>
+          <p:cNvSpPr>
+            <a:spLocks noGrp="1"/>
+          </p:cNvSpPr>
           <p:nvPr>
-            <p:ph idx="100" type="title" hasCustomPrompt="1"/>
+            <p:ph type="title" idx="100" hasCustomPrompt="1"/>
           </p:nvPr>
         </p:nvSpPr>
         <p:spPr>
@@ -4037,7 +3948,7 @@
           <a:bodyPr wrap="square" lIns="0" tIns="0" rIns="0" bIns="0" rtlCol="0" anchor="ctr"/>
           <a:lstStyle/>
           <a:p>
-            <a:pPr algn="l" indent="0" marL="0">
+            <a:pPr marL="0" indent="0" algn="l">
               <a:buNone/>
             </a:pPr>
             <a:r>
@@ -4076,7 +3987,7 @@
           <a:bodyPr wrap="square" lIns="0" tIns="0" rIns="0" bIns="0" rtlCol="0" anchor="t"/>
           <a:lstStyle/>
           <a:p>
-            <a:pPr algn="l" indent="0" marL="0">
+            <a:pPr marL="0" indent="0" algn="l">
               <a:buNone/>
             </a:pPr>
             <a:r>
@@ -4119,7 +4030,7 @@
           <a:bodyPr wrap="square" lIns="508" tIns="508" rIns="508" bIns="508" rtlCol="0" anchor="ctr"/>
           <a:lstStyle/>
           <a:p>
-            <a:pPr algn="ctr" indent="0" marL="0">
+            <a:pPr marL="0" indent="0" algn="ctr">
               <a:buNone/>
             </a:pPr>
             <a:r>
@@ -4133,9 +4044,6 @@
               </a:rPr>
               <a:t>समय इतनी तेजी से क्यों गुजरता है?</a:t>
             </a:r>
-            <a:pPr algn="ctr" indent="0" marL="0">
-              <a:buNone/>
-            </a:pPr>
             <a:r>
               <a:rPr lang="en-US" sz="1400" dirty="0">
                 <a:solidFill>
@@ -4172,7 +4080,7 @@
           <a:bodyPr wrap="square" lIns="0" tIns="0" rIns="0" bIns="0" rtlCol="0" anchor="t"/>
           <a:lstStyle/>
           <a:p>
-            <a:pPr algn="r" indent="0" marL="0">
+            <a:pPr marL="0" indent="0" algn="r">
               <a:buNone/>
             </a:pPr>
             <a:r>
@@ -4211,7 +4119,7 @@
           <a:bodyPr wrap="square" lIns="0" tIns="0" rIns="0" bIns="0" rtlCol="0" anchor="t"/>
           <a:lstStyle/>
           <a:p>
-            <a:pPr algn="l" indent="0" marL="0">
+            <a:pPr marL="0" indent="0" algn="l">
               <a:buNone/>
             </a:pPr>
             <a:r>
@@ -4250,7 +4158,7 @@
           <a:bodyPr wrap="square" lIns="0" tIns="0" rIns="0" bIns="0" rtlCol="0" anchor="t"/>
           <a:lstStyle/>
           <a:p>
-            <a:pPr algn="l" indent="0" marL="0">
+            <a:pPr marL="0" indent="0" algn="l">
               <a:buNone/>
             </a:pPr>
             <a:r>
@@ -4293,7 +4201,7 @@
           <a:bodyPr wrap="square" lIns="508" tIns="508" rIns="508" bIns="508" rtlCol="0" anchor="ctr"/>
           <a:lstStyle/>
           <a:p>
-            <a:pPr algn="ctr" indent="0" marL="0">
+            <a:pPr marL="0" indent="0" algn="ctr">
               <a:buNone/>
             </a:pPr>
             <a:r>
@@ -4332,7 +4240,7 @@
           <a:bodyPr wrap="square" lIns="0" tIns="0" rIns="0" bIns="0" rtlCol="0" anchor="t"/>
           <a:lstStyle/>
           <a:p>
-            <a:pPr algn="l" indent="0" marL="0">
+            <a:pPr marL="0" indent="0" algn="l">
               <a:buNone/>
             </a:pPr>
             <a:r>
@@ -4375,7 +4283,7 @@
           <a:bodyPr wrap="square" lIns="508" tIns="508" rIns="508" bIns="508" rtlCol="0" anchor="ctr"/>
           <a:lstStyle/>
           <a:p>
-            <a:pPr algn="ctr" indent="0" marL="0">
+            <a:pPr marL="0" indent="0" algn="ctr">
               <a:buNone/>
             </a:pPr>
             <a:r>
@@ -4414,7 +4322,7 @@
           <a:bodyPr wrap="square" lIns="0" tIns="0" rIns="0" bIns="0" rtlCol="0" anchor="t"/>
           <a:lstStyle/>
           <a:p>
-            <a:pPr algn="l" indent="0" marL="0">
+            <a:pPr marL="0" indent="0" algn="l">
               <a:buNone/>
             </a:pPr>
             <a:r>
@@ -4457,7 +4365,7 @@
           <a:bodyPr wrap="square" lIns="508" tIns="508" rIns="508" bIns="508" rtlCol="0" anchor="ctr"/>
           <a:lstStyle/>
           <a:p>
-            <a:pPr algn="ctr" indent="0" marL="0">
+            <a:pPr marL="0" indent="0" algn="ctr">
               <a:buNone/>
             </a:pPr>
             <a:r>
@@ -4496,7 +4404,7 @@
           <a:bodyPr wrap="square" lIns="0" tIns="0" rIns="0" bIns="0" rtlCol="0" anchor="t"/>
           <a:lstStyle/>
           <a:p>
-            <a:pPr algn="l" indent="0" marL="0">
+            <a:pPr marL="0" indent="0" algn="l">
               <a:buNone/>
             </a:pPr>
             <a:r>
@@ -4536,6 +4444,13 @@
             <a:prstDash val="solid"/>
           </a:ln>
         </p:spPr>
+        <p:txBody>
+          <a:bodyPr/>
+          <a:lstStyle/>
+          <a:p>
+            <a:endParaRPr lang="en-US"/>
+          </a:p>
+        </p:txBody>
       </p:sp>
       <p:sp>
         <p:nvSpPr>
@@ -4559,6 +4474,13 @@
             <a:prstDash val="solid"/>
           </a:ln>
         </p:spPr>
+        <p:txBody>
+          <a:bodyPr/>
+          <a:lstStyle/>
+          <a:p>
+            <a:endParaRPr lang="en-US"/>
+          </a:p>
+        </p:txBody>
       </p:sp>
       <p:sp>
         <p:nvSpPr>
@@ -4581,7 +4503,7 @@
           <a:bodyPr wrap="square" lIns="0" tIns="0" rIns="0" bIns="0" rtlCol="0" anchor="t"/>
           <a:lstStyle/>
           <a:p>
-            <a:pPr algn="l" indent="0" marL="0">
+            <a:pPr marL="0" indent="0" algn="l">
               <a:buNone/>
             </a:pPr>
             <a:r>
@@ -4595,9 +4517,6 @@
               </a:rPr>
               <a:t>Research question: </a:t>
             </a:r>
-            <a:pPr algn="l" indent="0" marL="0">
-              <a:buNone/>
-            </a:pPr>
             <a:r>
               <a:rPr lang="en-US" sz="1400" dirty="0">
                 <a:solidFill>
@@ -4633,7 +4552,7 @@
           </a:prstGeom>
           <a:extLst>
             <a:ext uri="{C572A759-6A51-4108-AA02-DFA0A04FC94B}">
-              <ma14:wrappingTextBoxFlag xmlns:ma14="http://schemas.microsoft.com/office/mac/drawingml/2011/main" val="0"/>
+              <ma14:wrappingTextBoxFlag xmlns:ma14="http://schemas.microsoft.com/office/mac/drawingml/2011/main" xmlns="" val="0"/>
             </a:ext>
           </a:extLst>
         </p:spPr>
@@ -4654,7 +4573,7 @@
           <a:p>
             <a:pPr algn="r"/>
             <a:fld id="{F7021451-1387-4CA6-816F-3879F97B5CBC}" type="slidenum">
-              <a:rPr b="0" lang="en-US"/>
+              <a:rPr lang="en-US" b="0"/>
               <a:t>2</a:t>
             </a:fld>
             <a:endParaRPr lang="en-US"/>
@@ -4689,9 +4608,11 @@
       <p:sp>
         <p:nvSpPr>
           <p:cNvPr id="2" name="Text 0"/>
-          <p:cNvSpPr/>
+          <p:cNvSpPr>
+            <a:spLocks noGrp="1"/>
+          </p:cNvSpPr>
           <p:nvPr>
-            <p:ph idx="100" type="title" hasCustomPrompt="1"/>
+            <p:ph type="title" idx="100" hasCustomPrompt="1"/>
           </p:nvPr>
         </p:nvSpPr>
         <p:spPr>
@@ -4709,7 +4630,7 @@
           <a:bodyPr wrap="square" lIns="0" tIns="0" rIns="0" bIns="0" rtlCol="0" anchor="ctr"/>
           <a:lstStyle/>
           <a:p>
-            <a:pPr algn="l" indent="0" marL="0">
+            <a:pPr marL="0" indent="0" algn="l">
               <a:buNone/>
             </a:pPr>
             <a:r>
@@ -4748,7 +4669,7 @@
           <a:bodyPr wrap="square" lIns="0" tIns="0" rIns="0" bIns="0" rtlCol="0" anchor="ctr"/>
           <a:lstStyle/>
           <a:p>
-            <a:pPr algn="l" indent="0" marL="0">
+            <a:pPr marL="0" indent="0" algn="l">
               <a:buNone/>
             </a:pPr>
             <a:r>
@@ -4787,7 +4708,7 @@
           <a:bodyPr wrap="square" lIns="0" tIns="0" rIns="0" bIns="0" rtlCol="0" anchor="t"/>
           <a:lstStyle/>
           <a:p>
-            <a:pPr algn="l" indent="0" marL="0">
+            <a:pPr marL="0" indent="0" algn="l">
               <a:buNone/>
             </a:pPr>
             <a:r>
@@ -4826,7 +4747,7 @@
           <a:bodyPr wrap="square" lIns="0" tIns="0" rIns="0" bIns="0" rtlCol="0" anchor="ctr"/>
           <a:lstStyle/>
           <a:p>
-            <a:pPr algn="l" indent="0" marL="0">
+            <a:pPr marL="0" indent="0" algn="l">
               <a:buNone/>
             </a:pPr>
             <a:r>
@@ -4865,7 +4786,7 @@
           <a:bodyPr wrap="square" lIns="0" tIns="0" rIns="0" bIns="0" rtlCol="0" anchor="t"/>
           <a:lstStyle/>
           <a:p>
-            <a:pPr algn="l" indent="0" marL="0">
+            <a:pPr marL="0" indent="0" algn="l">
               <a:buNone/>
             </a:pPr>
             <a:r>
@@ -4905,6 +4826,13 @@
             <a:prstDash val="solid"/>
           </a:ln>
         </p:spPr>
+        <p:txBody>
+          <a:bodyPr/>
+          <a:lstStyle/>
+          <a:p>
+            <a:endParaRPr lang="en-US"/>
+          </a:p>
+        </p:txBody>
       </p:sp>
       <p:sp>
         <p:nvSpPr>
@@ -4927,7 +4855,7 @@
           <a:bodyPr wrap="square" lIns="0" tIns="0" rIns="0" bIns="0" rtlCol="0" anchor="ctr"/>
           <a:lstStyle/>
           <a:p>
-            <a:pPr algn="l" indent="0" marL="0">
+            <a:pPr marL="0" indent="0" algn="l">
               <a:buNone/>
             </a:pPr>
             <a:r>
@@ -4966,7 +4894,7 @@
           <a:bodyPr wrap="square" lIns="0" tIns="0" rIns="0" bIns="0" rtlCol="0" anchor="t"/>
           <a:lstStyle/>
           <a:p>
-            <a:pPr algn="l" indent="0" marL="0">
+            <a:pPr marL="0" indent="0" algn="l">
               <a:buNone/>
             </a:pPr>
             <a:r>
@@ -5006,6 +4934,13 @@
             <a:prstDash val="solid"/>
           </a:ln>
         </p:spPr>
+        <p:txBody>
+          <a:bodyPr/>
+          <a:lstStyle/>
+          <a:p>
+            <a:endParaRPr lang="en-US"/>
+          </a:p>
+        </p:txBody>
       </p:sp>
       <p:sp>
         <p:nvSpPr>
@@ -5029,6 +4964,13 @@
             <a:prstDash val="solid"/>
           </a:ln>
         </p:spPr>
+        <p:txBody>
+          <a:bodyPr/>
+          <a:lstStyle/>
+          <a:p>
+            <a:endParaRPr lang="en-US"/>
+          </a:p>
+        </p:txBody>
       </p:sp>
       <p:sp>
         <p:nvSpPr>
@@ -5051,7 +4993,7 @@
           <a:bodyPr wrap="square" lIns="0" tIns="0" rIns="0" bIns="0" rtlCol="0" anchor="t"/>
           <a:lstStyle/>
           <a:p>
-            <a:pPr algn="l" indent="0" marL="0">
+            <a:pPr marL="0" indent="0" algn="l">
               <a:buNone/>
             </a:pPr>
             <a:r>
@@ -5090,7 +5032,7 @@
           <a:bodyPr wrap="square" lIns="0" tIns="0" rIns="0" bIns="0" rtlCol="0" anchor="t"/>
           <a:lstStyle/>
           <a:p>
-            <a:pPr algn="l" indent="0" marL="0">
+            <a:pPr marL="0" indent="0" algn="l">
               <a:buNone/>
             </a:pPr>
             <a:r>
@@ -5129,7 +5071,7 @@
           <a:bodyPr wrap="square" lIns="0" tIns="0" rIns="0" bIns="0" rtlCol="0" anchor="t"/>
           <a:lstStyle/>
           <a:p>
-            <a:pPr algn="l" indent="0" marL="0">
+            <a:pPr marL="0" indent="0" algn="l">
               <a:buNone/>
             </a:pPr>
             <a:r>
@@ -5168,7 +5110,7 @@
           <a:bodyPr wrap="square" lIns="0" tIns="0" rIns="0" bIns="0" rtlCol="0" anchor="t"/>
           <a:lstStyle/>
           <a:p>
-            <a:pPr algn="l" indent="0" marL="0">
+            <a:pPr marL="0" indent="0" algn="l">
               <a:spcAft>
                 <a:spcPts val="400"/>
               </a:spcAft>
@@ -5188,7 +5130,7 @@
             <a:endParaRPr lang="en-US" sz="1400" dirty="0"/>
           </a:p>
           <a:p>
-            <a:pPr algn="l" indent="0" marL="0">
+            <a:pPr marL="0" indent="0" algn="l">
               <a:spcAft>
                 <a:spcPts val="400"/>
               </a:spcAft>
@@ -5229,7 +5171,7 @@
           </a:prstGeom>
           <a:extLst>
             <a:ext uri="{C572A759-6A51-4108-AA02-DFA0A04FC94B}">
-              <ma14:wrappingTextBoxFlag xmlns:ma14="http://schemas.microsoft.com/office/mac/drawingml/2011/main" val="0"/>
+              <ma14:wrappingTextBoxFlag xmlns:ma14="http://schemas.microsoft.com/office/mac/drawingml/2011/main" xmlns="" val="0"/>
             </a:ext>
           </a:extLst>
         </p:spPr>
@@ -5250,7 +5192,7 @@
           <a:p>
             <a:pPr algn="r"/>
             <a:fld id="{F7021451-1387-4CA6-816F-3879F97B5CBC}" type="slidenum">
-              <a:rPr b="0" lang="en-US"/>
+              <a:rPr lang="en-US" b="0"/>
               <a:t>3</a:t>
             </a:fld>
             <a:endParaRPr lang="en-US"/>
@@ -5285,9 +5227,11 @@
       <p:sp>
         <p:nvSpPr>
           <p:cNvPr id="2" name="Text 0"/>
-          <p:cNvSpPr/>
+          <p:cNvSpPr>
+            <a:spLocks noGrp="1"/>
+          </p:cNvSpPr>
           <p:nvPr>
-            <p:ph idx="100" type="title" hasCustomPrompt="1"/>
+            <p:ph type="title" idx="100" hasCustomPrompt="1"/>
           </p:nvPr>
         </p:nvSpPr>
         <p:spPr>
@@ -5305,7 +5249,7 @@
           <a:bodyPr wrap="square" lIns="0" tIns="0" rIns="0" bIns="0" rtlCol="0" anchor="ctr"/>
           <a:lstStyle/>
           <a:p>
-            <a:pPr algn="l" indent="0" marL="0">
+            <a:pPr marL="0" indent="0" algn="l">
               <a:buNone/>
             </a:pPr>
             <a:r>
@@ -5344,7 +5288,7 @@
           <a:bodyPr wrap="square" lIns="0" tIns="0" rIns="0" bIns="0" rtlCol="0" anchor="t"/>
           <a:lstStyle/>
           <a:p>
-            <a:pPr algn="l" indent="0" marL="0">
+            <a:pPr marL="0" indent="0" algn="l">
               <a:buNone/>
             </a:pPr>
             <a:r>
@@ -5387,7 +5331,7 @@
           <a:bodyPr wrap="square" lIns="508" tIns="508" rIns="508" bIns="508" rtlCol="0" anchor="ctr"/>
           <a:lstStyle/>
           <a:p>
-            <a:pPr algn="ctr" indent="0" marL="0">
+            <a:pPr marL="0" indent="0" algn="ctr">
               <a:buNone/>
             </a:pPr>
             <a:r>
@@ -5430,7 +5374,7 @@
           <a:bodyPr wrap="square" lIns="508" tIns="508" rIns="508" bIns="508" rtlCol="0" anchor="ctr"/>
           <a:lstStyle/>
           <a:p>
-            <a:pPr algn="ctr" indent="0" marL="0">
+            <a:pPr marL="0" indent="0" algn="ctr">
               <a:buNone/>
             </a:pPr>
             <a:r>
@@ -5475,7 +5419,7 @@
           <a:bodyPr wrap="square" lIns="508" tIns="508" rIns="508" bIns="508" rtlCol="0" anchor="ctr"/>
           <a:lstStyle/>
           <a:p>
-            <a:pPr algn="ctr" indent="0" marL="0">
+            <a:pPr marL="0" indent="0" algn="ctr">
               <a:buNone/>
             </a:pPr>
             <a:r>
@@ -5520,7 +5464,7 @@
           <a:bodyPr wrap="square" lIns="508" tIns="508" rIns="508" bIns="508" rtlCol="0" anchor="ctr"/>
           <a:lstStyle/>
           <a:p>
-            <a:pPr algn="ctr" indent="0" marL="0">
+            <a:pPr marL="0" indent="0" algn="ctr">
               <a:buNone/>
             </a:pPr>
             <a:r>
@@ -5565,7 +5509,7 @@
           <a:bodyPr wrap="square" lIns="508" tIns="508" rIns="508" bIns="508" rtlCol="0" anchor="ctr"/>
           <a:lstStyle/>
           <a:p>
-            <a:pPr algn="ctr" indent="0" marL="0">
+            <a:pPr marL="0" indent="0" algn="ctr">
               <a:buNone/>
             </a:pPr>
             <a:r>
@@ -5610,7 +5554,7 @@
           <a:bodyPr wrap="square" lIns="508" tIns="508" rIns="508" bIns="508" rtlCol="0" anchor="ctr"/>
           <a:lstStyle/>
           <a:p>
-            <a:pPr algn="ctr" indent="0" marL="0">
+            <a:pPr marL="0" indent="0" algn="ctr">
               <a:buNone/>
             </a:pPr>
             <a:r>
@@ -5655,7 +5599,7 @@
           <a:bodyPr wrap="square" lIns="508" tIns="508" rIns="508" bIns="508" rtlCol="0" anchor="ctr"/>
           <a:lstStyle/>
           <a:p>
-            <a:pPr algn="ctr" indent="0" marL="0">
+            <a:pPr marL="0" indent="0" algn="ctr">
               <a:buNone/>
             </a:pPr>
             <a:r>
@@ -5700,7 +5644,7 @@
           <a:bodyPr wrap="square" lIns="508" tIns="508" rIns="508" bIns="508" rtlCol="0" anchor="ctr"/>
           <a:lstStyle/>
           <a:p>
-            <a:pPr algn="ctr" indent="0" marL="0">
+            <a:pPr marL="0" indent="0" algn="ctr">
               <a:buNone/>
             </a:pPr>
             <a:r>
@@ -5743,7 +5687,7 @@
           <a:bodyPr wrap="square" lIns="508" tIns="508" rIns="508" bIns="508" rtlCol="0" anchor="ctr"/>
           <a:lstStyle/>
           <a:p>
-            <a:pPr algn="ctr" indent="0" marL="0">
+            <a:pPr marL="0" indent="0" algn="ctr">
               <a:buNone/>
             </a:pPr>
             <a:r>
@@ -5784,6 +5728,13 @@
             <a:tailEnd type="triangle"/>
           </a:ln>
         </p:spPr>
+        <p:txBody>
+          <a:bodyPr/>
+          <a:lstStyle/>
+          <a:p>
+            <a:endParaRPr lang="en-US"/>
+          </a:p>
+        </p:txBody>
       </p:sp>
       <p:sp>
         <p:nvSpPr>
@@ -5808,6 +5759,13 @@
             <a:tailEnd type="triangle"/>
           </a:ln>
         </p:spPr>
+        <p:txBody>
+          <a:bodyPr/>
+          <a:lstStyle/>
+          <a:p>
+            <a:endParaRPr lang="en-US"/>
+          </a:p>
+        </p:txBody>
       </p:sp>
       <p:sp>
         <p:nvSpPr>
@@ -5832,6 +5790,13 @@
             <a:tailEnd type="triangle"/>
           </a:ln>
         </p:spPr>
+        <p:txBody>
+          <a:bodyPr/>
+          <a:lstStyle/>
+          <a:p>
+            <a:endParaRPr lang="en-US"/>
+          </a:p>
+        </p:txBody>
       </p:sp>
       <p:sp>
         <p:nvSpPr>
@@ -5858,7 +5823,7 @@
           <a:bodyPr wrap="square" lIns="508" tIns="508" rIns="508" bIns="508" rtlCol="0" anchor="ctr"/>
           <a:lstStyle/>
           <a:p>
-            <a:pPr algn="ctr" indent="0" marL="0">
+            <a:pPr marL="0" indent="0" algn="ctr">
               <a:buNone/>
             </a:pPr>
             <a:r>
@@ -5901,7 +5866,7 @@
           <a:bodyPr wrap="square" lIns="508" tIns="508" rIns="508" bIns="508" rtlCol="0" anchor="ctr"/>
           <a:lstStyle/>
           <a:p>
-            <a:pPr algn="ctr" indent="0" marL="0">
+            <a:pPr marL="0" indent="0" algn="ctr">
               <a:buNone/>
             </a:pPr>
             <a:r>
@@ -5944,7 +5909,7 @@
           <a:bodyPr wrap="square" lIns="508" tIns="508" rIns="508" bIns="508" rtlCol="0" anchor="ctr"/>
           <a:lstStyle/>
           <a:p>
-            <a:pPr algn="ctr" indent="0" marL="0">
+            <a:pPr marL="0" indent="0" algn="ctr">
               <a:buNone/>
             </a:pPr>
             <a:r>
@@ -5985,6 +5950,13 @@
             <a:tailEnd type="triangle"/>
           </a:ln>
         </p:spPr>
+        <p:txBody>
+          <a:bodyPr/>
+          <a:lstStyle/>
+          <a:p>
+            <a:endParaRPr lang="en-US"/>
+          </a:p>
+        </p:txBody>
       </p:sp>
       <p:sp>
         <p:nvSpPr>
@@ -6009,6 +5981,13 @@
             <a:tailEnd type="triangle"/>
           </a:ln>
         </p:spPr>
+        <p:txBody>
+          <a:bodyPr/>
+          <a:lstStyle/>
+          <a:p>
+            <a:endParaRPr lang="en-US"/>
+          </a:p>
+        </p:txBody>
       </p:sp>
       <p:sp>
         <p:nvSpPr>
@@ -6032,6 +6011,13 @@
             <a:prstDash val="solid"/>
           </a:ln>
         </p:spPr>
+        <p:txBody>
+          <a:bodyPr/>
+          <a:lstStyle/>
+          <a:p>
+            <a:endParaRPr lang="en-US"/>
+          </a:p>
+        </p:txBody>
       </p:sp>
       <p:sp>
         <p:nvSpPr>
@@ -6055,6 +6041,13 @@
             <a:prstDash val="solid"/>
           </a:ln>
         </p:spPr>
+        <p:txBody>
+          <a:bodyPr/>
+          <a:lstStyle/>
+          <a:p>
+            <a:endParaRPr lang="en-US"/>
+          </a:p>
+        </p:txBody>
       </p:sp>
       <p:sp>
         <p:nvSpPr>
@@ -6079,6 +6072,13 @@
             <a:tailEnd type="triangle"/>
           </a:ln>
         </p:spPr>
+        <p:txBody>
+          <a:bodyPr/>
+          <a:lstStyle/>
+          <a:p>
+            <a:endParaRPr lang="en-US"/>
+          </a:p>
+        </p:txBody>
       </p:sp>
       <p:sp>
         <p:nvSpPr>
@@ -6100,7 +6100,7 @@
           </a:prstGeom>
           <a:extLst>
             <a:ext uri="{C572A759-6A51-4108-AA02-DFA0A04FC94B}">
-              <ma14:wrappingTextBoxFlag xmlns:ma14="http://schemas.microsoft.com/office/mac/drawingml/2011/main" val="0"/>
+              <ma14:wrappingTextBoxFlag xmlns:ma14="http://schemas.microsoft.com/office/mac/drawingml/2011/main" xmlns="" val="0"/>
             </a:ext>
           </a:extLst>
         </p:spPr>
@@ -6121,7 +6121,7 @@
           <a:p>
             <a:pPr algn="r"/>
             <a:fld id="{F7021451-1387-4CA6-816F-3879F97B5CBC}" type="slidenum">
-              <a:rPr b="0" lang="en-US"/>
+              <a:rPr lang="en-US" b="0"/>
               <a:t>4</a:t>
             </a:fld>
             <a:endParaRPr lang="en-US"/>
@@ -6156,9 +6156,11 @@
       <p:sp>
         <p:nvSpPr>
           <p:cNvPr id="2" name="Text 0"/>
-          <p:cNvSpPr/>
+          <p:cNvSpPr>
+            <a:spLocks noGrp="1"/>
+          </p:cNvSpPr>
           <p:nvPr>
-            <p:ph idx="100" type="title" hasCustomPrompt="1"/>
+            <p:ph type="title" idx="100" hasCustomPrompt="1"/>
           </p:nvPr>
         </p:nvSpPr>
         <p:spPr>
@@ -6176,7 +6178,7 @@
           <a:bodyPr wrap="square" lIns="0" tIns="0" rIns="0" bIns="0" rtlCol="0" anchor="ctr"/>
           <a:lstStyle/>
           <a:p>
-            <a:pPr algn="l" indent="0" marL="0">
+            <a:pPr marL="0" indent="0" algn="l">
               <a:buNone/>
             </a:pPr>
             <a:r>
@@ -6215,7 +6217,7 @@
           <a:bodyPr wrap="square" lIns="0" tIns="0" rIns="0" bIns="0" rtlCol="0" anchor="t"/>
           <a:lstStyle/>
           <a:p>
-            <a:pPr algn="l" indent="0" marL="0">
+            <a:pPr marL="0" indent="0" algn="l">
               <a:buNone/>
             </a:pPr>
             <a:r>
@@ -6254,7 +6256,7 @@
           <a:bodyPr wrap="square" lIns="0" tIns="0" rIns="0" bIns="0" rtlCol="0" anchor="t"/>
           <a:lstStyle/>
           <a:p>
-            <a:pPr algn="l" indent="0" marL="0">
+            <a:pPr marL="0" indent="0" algn="l">
               <a:buNone/>
             </a:pPr>
             <a:r>
@@ -6293,7 +6295,7 @@
           <a:bodyPr wrap="square" lIns="0" tIns="0" rIns="0" bIns="0" rtlCol="0" anchor="t"/>
           <a:lstStyle/>
           <a:p>
-            <a:pPr algn="l" indent="0" marL="0">
+            <a:pPr marL="0" indent="0" algn="l">
               <a:buNone/>
             </a:pPr>
             <a:r>
@@ -6336,7 +6338,7 @@
           <a:bodyPr wrap="square" lIns="508" tIns="508" rIns="508" bIns="508" rtlCol="0" anchor="ctr"/>
           <a:lstStyle/>
           <a:p>
-            <a:pPr algn="ctr" indent="0" marL="0">
+            <a:pPr marL="0" indent="0" algn="ctr">
               <a:buNone/>
             </a:pPr>
             <a:r>
@@ -6375,7 +6377,7 @@
           <a:bodyPr wrap="square" lIns="0" tIns="0" rIns="0" bIns="0" rtlCol="0" anchor="t"/>
           <a:lstStyle/>
           <a:p>
-            <a:pPr algn="l" indent="0" marL="0">
+            <a:pPr marL="0" indent="0" algn="l">
               <a:buNone/>
             </a:pPr>
             <a:r>
@@ -6418,7 +6420,7 @@
           <a:bodyPr wrap="square" lIns="508" tIns="508" rIns="508" bIns="508" rtlCol="0" anchor="ctr"/>
           <a:lstStyle/>
           <a:p>
-            <a:pPr algn="ctr" indent="0" marL="0">
+            <a:pPr marL="0" indent="0" algn="ctr">
               <a:buNone/>
             </a:pPr>
             <a:r>
@@ -6457,7 +6459,7 @@
           <a:bodyPr wrap="square" lIns="0" tIns="0" rIns="0" bIns="0" rtlCol="0" anchor="t"/>
           <a:lstStyle/>
           <a:p>
-            <a:pPr algn="l" indent="0" marL="0">
+            <a:pPr marL="0" indent="0" algn="l">
               <a:buNone/>
             </a:pPr>
             <a:r>
@@ -6500,7 +6502,7 @@
           <a:bodyPr wrap="square" lIns="508" tIns="508" rIns="508" bIns="508" rtlCol="0" anchor="ctr"/>
           <a:lstStyle/>
           <a:p>
-            <a:pPr algn="ctr" indent="0" marL="0">
+            <a:pPr marL="0" indent="0" algn="ctr">
               <a:buNone/>
             </a:pPr>
             <a:r>
@@ -6539,7 +6541,7 @@
           <a:bodyPr wrap="square" lIns="0" tIns="0" rIns="0" bIns="0" rtlCol="0" anchor="t"/>
           <a:lstStyle/>
           <a:p>
-            <a:pPr algn="l" indent="0" marL="0">
+            <a:pPr marL="0" indent="0" algn="l">
               <a:buNone/>
             </a:pPr>
             <a:r>
@@ -6578,7 +6580,7 @@
           <a:bodyPr wrap="square" lIns="0" tIns="0" rIns="0" bIns="0" rtlCol="0" anchor="t"/>
           <a:lstStyle/>
           <a:p>
-            <a:pPr algn="l" indent="0" marL="0">
+            <a:pPr marL="0" indent="0" algn="l">
               <a:buNone/>
             </a:pPr>
             <a:r>
@@ -6617,7 +6619,7 @@
           <a:bodyPr wrap="square" lIns="0" tIns="0" rIns="0" bIns="0" rtlCol="0" anchor="t"/>
           <a:lstStyle/>
           <a:p>
-            <a:pPr algn="l" indent="0" marL="0">
+            <a:pPr marL="0" indent="0" algn="l">
               <a:buNone/>
             </a:pPr>
             <a:r>
@@ -6660,7 +6662,7 @@
           <a:bodyPr wrap="square" lIns="508" tIns="508" rIns="508" bIns="508" rtlCol="0" anchor="ctr"/>
           <a:lstStyle/>
           <a:p>
-            <a:pPr algn="ctr" indent="0" marL="0">
+            <a:pPr marL="0" indent="0" algn="ctr">
               <a:buNone/>
             </a:pPr>
             <a:r>
@@ -6699,7 +6701,7 @@
           <a:bodyPr wrap="square" lIns="0" tIns="0" rIns="0" bIns="0" rtlCol="0" anchor="t"/>
           <a:lstStyle/>
           <a:p>
-            <a:pPr algn="l" indent="0" marL="0">
+            <a:pPr marL="0" indent="0" algn="l">
               <a:buNone/>
             </a:pPr>
             <a:r>
@@ -6739,6 +6741,13 @@
             <a:prstDash val="solid"/>
           </a:ln>
         </p:spPr>
+        <p:txBody>
+          <a:bodyPr/>
+          <a:lstStyle/>
+          <a:p>
+            <a:endParaRPr lang="en-US"/>
+          </a:p>
+        </p:txBody>
       </p:sp>
       <p:sp>
         <p:nvSpPr>
@@ -6761,7 +6770,7 @@
           <a:bodyPr wrap="square" lIns="0" tIns="0" rIns="0" bIns="0" rtlCol="0" anchor="ctr"/>
           <a:lstStyle/>
           <a:p>
-            <a:pPr algn="l" indent="0" marL="0">
+            <a:pPr marL="0" indent="0" algn="l">
               <a:buNone/>
             </a:pPr>
             <a:r>
@@ -6800,7 +6809,7 @@
           <a:bodyPr wrap="square" lIns="0" tIns="0" rIns="0" bIns="0" rtlCol="0" anchor="t"/>
           <a:lstStyle/>
           <a:p>
-            <a:pPr algn="l" indent="0" marL="0">
+            <a:pPr marL="0" indent="0" algn="l">
               <a:buNone/>
             </a:pPr>
             <a:r>
@@ -6839,7 +6848,7 @@
           <a:bodyPr wrap="square" lIns="0" tIns="0" rIns="0" bIns="0" rtlCol="0" anchor="ctr"/>
           <a:lstStyle/>
           <a:p>
-            <a:pPr algn="l" indent="0" marL="0">
+            <a:pPr marL="0" indent="0" algn="l">
               <a:buNone/>
             </a:pPr>
             <a:r>
@@ -6878,7 +6887,7 @@
           <a:bodyPr wrap="square" lIns="0" tIns="0" rIns="0" bIns="0" rtlCol="0" anchor="t"/>
           <a:lstStyle/>
           <a:p>
-            <a:pPr algn="l" indent="0" marL="0">
+            <a:pPr marL="0" indent="0" algn="l">
               <a:buNone/>
             </a:pPr>
             <a:r>
@@ -6917,7 +6926,7 @@
           <a:bodyPr wrap="square" lIns="0" tIns="0" rIns="0" bIns="0" rtlCol="0" anchor="t"/>
           <a:lstStyle/>
           <a:p>
-            <a:pPr algn="l" indent="0" marL="0">
+            <a:pPr marL="0" indent="0" algn="l">
               <a:buNone/>
             </a:pPr>
             <a:r>
@@ -6931,9 +6940,6 @@
               </a:rPr>
               <a:t>Effect on ranking: </a:t>
             </a:r>
-            <a:pPr algn="l" indent="0" marL="0">
-              <a:buNone/>
-            </a:pPr>
             <a:r>
               <a:rPr lang="en-US" sz="1400" dirty="0">
                 <a:solidFill>
@@ -6969,7 +6975,7 @@
           </a:prstGeom>
           <a:extLst>
             <a:ext uri="{C572A759-6A51-4108-AA02-DFA0A04FC94B}">
-              <ma14:wrappingTextBoxFlag xmlns:ma14="http://schemas.microsoft.com/office/mac/drawingml/2011/main" val="0"/>
+              <ma14:wrappingTextBoxFlag xmlns:ma14="http://schemas.microsoft.com/office/mac/drawingml/2011/main" xmlns="" val="0"/>
             </a:ext>
           </a:extLst>
         </p:spPr>
@@ -6990,7 +6996,7 @@
           <a:p>
             <a:pPr algn="r"/>
             <a:fld id="{F7021451-1387-4CA6-816F-3879F97B5CBC}" type="slidenum">
-              <a:rPr b="0" lang="en-US"/>
+              <a:rPr lang="en-US" b="0"/>
               <a:t>5</a:t>
             </a:fld>
             <a:endParaRPr lang="en-US"/>
@@ -7025,9 +7031,11 @@
       <p:sp>
         <p:nvSpPr>
           <p:cNvPr id="2" name="Text 0"/>
-          <p:cNvSpPr/>
+          <p:cNvSpPr>
+            <a:spLocks noGrp="1"/>
+          </p:cNvSpPr>
           <p:nvPr>
-            <p:ph idx="100" type="title" hasCustomPrompt="1"/>
+            <p:ph type="title" idx="100" hasCustomPrompt="1"/>
           </p:nvPr>
         </p:nvSpPr>
         <p:spPr>
@@ -7045,7 +7053,7 @@
           <a:bodyPr wrap="square" lIns="0" tIns="0" rIns="0" bIns="0" rtlCol="0" anchor="ctr"/>
           <a:lstStyle/>
           <a:p>
-            <a:pPr algn="l" indent="0" marL="0">
+            <a:pPr marL="0" indent="0" algn="l">
               <a:buNone/>
             </a:pPr>
             <a:r>
@@ -7085,6 +7093,13 @@
             <a:prstDash val="solid"/>
           </a:ln>
         </p:spPr>
+        <p:txBody>
+          <a:bodyPr/>
+          <a:lstStyle/>
+          <a:p>
+            <a:endParaRPr lang="en-US"/>
+          </a:p>
+        </p:txBody>
       </p:sp>
       <p:sp>
         <p:nvSpPr>
@@ -7108,6 +7123,13 @@
             <a:prstDash val="solid"/>
           </a:ln>
         </p:spPr>
+        <p:txBody>
+          <a:bodyPr/>
+          <a:lstStyle/>
+          <a:p>
+            <a:endParaRPr lang="en-US"/>
+          </a:p>
+        </p:txBody>
       </p:sp>
       <p:sp>
         <p:nvSpPr>
@@ -7130,7 +7152,7 @@
           <a:bodyPr wrap="square" lIns="0" tIns="0" rIns="0" bIns="0" rtlCol="0" anchor="t"/>
           <a:lstStyle/>
           <a:p>
-            <a:pPr algn="l" indent="0" marL="0">
+            <a:pPr marL="0" indent="0" algn="l">
               <a:buNone/>
             </a:pPr>
             <a:r>
@@ -7169,7 +7191,7 @@
           <a:bodyPr wrap="square" lIns="0" tIns="0" rIns="0" bIns="0" rtlCol="0" anchor="t"/>
           <a:lstStyle/>
           <a:p>
-            <a:pPr algn="l" indent="0" marL="0">
+            <a:pPr marL="0" indent="0" algn="l">
               <a:buNone/>
             </a:pPr>
             <a:r>
@@ -7208,7 +7230,7 @@
           <a:bodyPr wrap="square" lIns="0" tIns="0" rIns="0" bIns="0" rtlCol="0" anchor="t"/>
           <a:lstStyle/>
           <a:p>
-            <a:pPr algn="l" indent="0" marL="0">
+            <a:pPr marL="0" indent="0" algn="l">
               <a:buNone/>
             </a:pPr>
             <a:r>
@@ -7247,7 +7269,7 @@
           <a:bodyPr wrap="square" lIns="0" tIns="0" rIns="0" bIns="0" rtlCol="0" anchor="t"/>
           <a:lstStyle/>
           <a:p>
-            <a:pPr algn="l" indent="0" marL="0">
+            <a:pPr marL="0" indent="0" algn="l">
               <a:spcAft>
                 <a:spcPts val="200"/>
               </a:spcAft>
@@ -7267,7 +7289,7 @@
             <a:endParaRPr lang="en-US" sz="1600" dirty="0"/>
           </a:p>
           <a:p>
-            <a:pPr algn="l" indent="0" marL="0">
+            <a:pPr marL="0" indent="0" algn="l">
               <a:spcAft>
                 <a:spcPts val="200"/>
               </a:spcAft>
@@ -7287,7 +7309,7 @@
             <a:endParaRPr lang="en-US" sz="1600" dirty="0"/>
           </a:p>
           <a:p>
-            <a:pPr algn="l" indent="0" marL="0">
+            <a:pPr marL="0" indent="0" algn="l">
               <a:spcAft>
                 <a:spcPts val="200"/>
               </a:spcAft>
@@ -7310,7 +7332,7 @@
       </p:sp>
       <p:graphicFrame>
         <p:nvGraphicFramePr>
-          <p:cNvPr id="7" name="Table 0"/>
+          <p:cNvPr id="3" name="Table 0"/>
           <p:cNvGraphicFramePr>
             <a:graphicFrameLocks noGrp="1"/>
           </p:cNvGraphicFramePr>
@@ -7331,8 +7353,20 @@
             <a:tbl>
               <a:tblPr/>
               <a:tblGrid>
-                <a:gridCol w="1691640"/>
-                <a:gridCol w="640080"/>
+                <a:gridCol w="1691640">
+                  <a:extLst>
+                    <a:ext uri="{9D8B030D-6E8A-4147-A177-3AD203B41FA5}">
+                      <a16:colId xmlns:a16="http://schemas.microsoft.com/office/drawing/2014/main" val="20000"/>
+                    </a:ext>
+                  </a:extLst>
+                </a:gridCol>
+                <a:gridCol w="640080">
+                  <a:extLst>
+                    <a:ext uri="{9D8B030D-6E8A-4147-A177-3AD203B41FA5}">
+                      <a16:colId xmlns:a16="http://schemas.microsoft.com/office/drawing/2014/main" val="20001"/>
+                    </a:ext>
+                  </a:extLst>
+                </a:gridCol>
               </a:tblGrid>
               <a:tr h="329184">
                 <a:tc>
@@ -7340,7 +7374,7 @@
                     <a:bodyPr/>
                     <a:lstStyle/>
                     <a:p>
-                      <a:pPr indent="0" marL="0">
+                      <a:pPr marL="0" indent="0">
                         <a:buNone/>
                       </a:pPr>
                       <a:r>
@@ -7387,7 +7421,7 @@
                     <a:bodyPr/>
                     <a:lstStyle/>
                     <a:p>
-                      <a:pPr algn="r" indent="0" marL="0">
+                      <a:pPr marL="0" indent="0" algn="r">
                         <a:buNone/>
                       </a:pPr>
                       <a:r>
@@ -7429,6 +7463,11 @@
                     </a:lnB>
                   </a:tcPr>
                 </a:tc>
+                <a:extLst>
+                  <a:ext uri="{0D108BD9-81ED-4DB2-BD59-A6C34878D82A}">
+                    <a16:rowId xmlns:a16="http://schemas.microsoft.com/office/drawing/2014/main" val="10000"/>
+                  </a:ext>
+                </a:extLst>
               </a:tr>
               <a:tr h="329184">
                 <a:tc>
@@ -7436,7 +7475,7 @@
                     <a:bodyPr/>
                     <a:lstStyle/>
                     <a:p>
-                      <a:pPr indent="0" marL="0">
+                      <a:pPr marL="0" indent="0">
                         <a:buNone/>
                       </a:pPr>
                       <a:r>
@@ -7464,8 +7503,14 @@
                     <a:lnR w="0" cap="flat" cmpd="sng" algn="ctr">
                       <a:noFill/>
                     </a:lnR>
-                    <a:lnT w="0" cap="flat" cmpd="sng" algn="ctr">
-                      <a:noFill/>
+                    <a:lnT w="12700" cap="flat" cmpd="sng" algn="ctr">
+                      <a:solidFill>
+                        <a:srgbClr val="1A1A1A"/>
+                      </a:solidFill>
+                      <a:prstDash val="solid"/>
+                      <a:round/>
+                      <a:headEnd type="none" w="med" len="med"/>
+                      <a:tailEnd type="none" w="med" len="med"/>
                     </a:lnT>
                     <a:lnB w="9525" cap="flat" cmpd="sng" algn="ctr">
                       <a:solidFill>
@@ -7483,7 +7528,7 @@
                     <a:bodyPr/>
                     <a:lstStyle/>
                     <a:p>
-                      <a:pPr algn="r" indent="0" marL="0">
+                      <a:pPr marL="0" indent="0" algn="r">
                         <a:buNone/>
                       </a:pPr>
                       <a:r>
@@ -7511,8 +7556,14 @@
                     <a:lnR w="0" cap="flat" cmpd="sng" algn="ctr">
                       <a:noFill/>
                     </a:lnR>
-                    <a:lnT w="0" cap="flat" cmpd="sng" algn="ctr">
-                      <a:noFill/>
+                    <a:lnT w="12700" cap="flat" cmpd="sng" algn="ctr">
+                      <a:solidFill>
+                        <a:srgbClr val="1A1A1A"/>
+                      </a:solidFill>
+                      <a:prstDash val="solid"/>
+                      <a:round/>
+                      <a:headEnd type="none" w="med" len="med"/>
+                      <a:tailEnd type="none" w="med" len="med"/>
                     </a:lnT>
                     <a:lnB w="9525" cap="flat" cmpd="sng" algn="ctr">
                       <a:solidFill>
@@ -7525,6 +7576,11 @@
                     </a:lnB>
                   </a:tcPr>
                 </a:tc>
+                <a:extLst>
+                  <a:ext uri="{0D108BD9-81ED-4DB2-BD59-A6C34878D82A}">
+                    <a16:rowId xmlns:a16="http://schemas.microsoft.com/office/drawing/2014/main" val="10001"/>
+                  </a:ext>
+                </a:extLst>
               </a:tr>
               <a:tr h="329184">
                 <a:tc>
@@ -7532,7 +7588,7 @@
                     <a:bodyPr/>
                     <a:lstStyle/>
                     <a:p>
-                      <a:pPr indent="0" marL="0">
+                      <a:pPr marL="0" indent="0">
                         <a:buNone/>
                       </a:pPr>
                       <a:r>
@@ -7560,8 +7616,14 @@
                     <a:lnR w="0" cap="flat" cmpd="sng" algn="ctr">
                       <a:noFill/>
                     </a:lnR>
-                    <a:lnT w="0" cap="flat" cmpd="sng" algn="ctr">
-                      <a:noFill/>
+                    <a:lnT w="9525" cap="flat" cmpd="sng" algn="ctr">
+                      <a:solidFill>
+                        <a:srgbClr val="C3C9D0"/>
+                      </a:solidFill>
+                      <a:prstDash val="solid"/>
+                      <a:round/>
+                      <a:headEnd type="none" w="med" len="med"/>
+                      <a:tailEnd type="none" w="med" len="med"/>
                     </a:lnT>
                     <a:lnB w="9525" cap="flat" cmpd="sng" algn="ctr">
                       <a:solidFill>
@@ -7579,7 +7641,7 @@
                     <a:bodyPr/>
                     <a:lstStyle/>
                     <a:p>
-                      <a:pPr algn="r" indent="0" marL="0">
+                      <a:pPr marL="0" indent="0" algn="r">
                         <a:buNone/>
                       </a:pPr>
                       <a:r>
@@ -7607,8 +7669,14 @@
                     <a:lnR w="0" cap="flat" cmpd="sng" algn="ctr">
                       <a:noFill/>
                     </a:lnR>
-                    <a:lnT w="0" cap="flat" cmpd="sng" algn="ctr">
-                      <a:noFill/>
+                    <a:lnT w="9525" cap="flat" cmpd="sng" algn="ctr">
+                      <a:solidFill>
+                        <a:srgbClr val="C3C9D0"/>
+                      </a:solidFill>
+                      <a:prstDash val="solid"/>
+                      <a:round/>
+                      <a:headEnd type="none" w="med" len="med"/>
+                      <a:tailEnd type="none" w="med" len="med"/>
                     </a:lnT>
                     <a:lnB w="9525" cap="flat" cmpd="sng" algn="ctr">
                       <a:solidFill>
@@ -7621,6 +7689,11 @@
                     </a:lnB>
                   </a:tcPr>
                 </a:tc>
+                <a:extLst>
+                  <a:ext uri="{0D108BD9-81ED-4DB2-BD59-A6C34878D82A}">
+                    <a16:rowId xmlns:a16="http://schemas.microsoft.com/office/drawing/2014/main" val="10002"/>
+                  </a:ext>
+                </a:extLst>
               </a:tr>
               <a:tr h="329184">
                 <a:tc>
@@ -7628,7 +7701,7 @@
                     <a:bodyPr/>
                     <a:lstStyle/>
                     <a:p>
-                      <a:pPr indent="0" marL="0">
+                      <a:pPr marL="0" indent="0">
                         <a:buNone/>
                       </a:pPr>
                       <a:r>
@@ -7656,8 +7729,14 @@
                     <a:lnR w="0" cap="flat" cmpd="sng" algn="ctr">
                       <a:noFill/>
                     </a:lnR>
-                    <a:lnT w="0" cap="flat" cmpd="sng" algn="ctr">
-                      <a:noFill/>
+                    <a:lnT w="9525" cap="flat" cmpd="sng" algn="ctr">
+                      <a:solidFill>
+                        <a:srgbClr val="C3C9D0"/>
+                      </a:solidFill>
+                      <a:prstDash val="solid"/>
+                      <a:round/>
+                      <a:headEnd type="none" w="med" len="med"/>
+                      <a:tailEnd type="none" w="med" len="med"/>
                     </a:lnT>
                     <a:lnB w="9525" cap="flat" cmpd="sng" algn="ctr">
                       <a:solidFill>
@@ -7675,7 +7754,7 @@
                     <a:bodyPr/>
                     <a:lstStyle/>
                     <a:p>
-                      <a:pPr algn="r" indent="0" marL="0">
+                      <a:pPr marL="0" indent="0" algn="r">
                         <a:buNone/>
                       </a:pPr>
                       <a:r>
@@ -7703,8 +7782,14 @@
                     <a:lnR w="0" cap="flat" cmpd="sng" algn="ctr">
                       <a:noFill/>
                     </a:lnR>
-                    <a:lnT w="0" cap="flat" cmpd="sng" algn="ctr">
-                      <a:noFill/>
+                    <a:lnT w="9525" cap="flat" cmpd="sng" algn="ctr">
+                      <a:solidFill>
+                        <a:srgbClr val="C3C9D0"/>
+                      </a:solidFill>
+                      <a:prstDash val="solid"/>
+                      <a:round/>
+                      <a:headEnd type="none" w="med" len="med"/>
+                      <a:tailEnd type="none" w="med" len="med"/>
                     </a:lnT>
                     <a:lnB w="9525" cap="flat" cmpd="sng" algn="ctr">
                       <a:solidFill>
@@ -7717,6 +7802,11 @@
                     </a:lnB>
                   </a:tcPr>
                 </a:tc>
+                <a:extLst>
+                  <a:ext uri="{0D108BD9-81ED-4DB2-BD59-A6C34878D82A}">
+                    <a16:rowId xmlns:a16="http://schemas.microsoft.com/office/drawing/2014/main" val="10003"/>
+                  </a:ext>
+                </a:extLst>
               </a:tr>
             </a:tbl>
           </a:graphicData>
@@ -7743,7 +7833,7 @@
           <a:bodyPr wrap="square" lIns="0" tIns="0" rIns="0" bIns="0" rtlCol="0" anchor="t"/>
           <a:lstStyle/>
           <a:p>
-            <a:pPr algn="l" indent="0" marL="0">
+            <a:pPr marL="0" indent="0" algn="l">
               <a:spcAft>
                 <a:spcPts val="800"/>
               </a:spcAft>
@@ -7763,7 +7853,7 @@
             <a:endParaRPr lang="en-US" sz="1600" dirty="0"/>
           </a:p>
           <a:p>
-            <a:pPr algn="l" indent="0" marL="0">
+            <a:pPr marL="0" indent="0" algn="l">
               <a:spcAft>
                 <a:spcPts val="800"/>
               </a:spcAft>
@@ -7783,7 +7873,7 @@
             <a:endParaRPr lang="en-US" sz="1600" dirty="0"/>
           </a:p>
           <a:p>
-            <a:pPr algn="l" indent="0" marL="0">
+            <a:pPr marL="0" indent="0" algn="l">
               <a:spcAft>
                 <a:spcPts val="800"/>
               </a:spcAft>
@@ -7825,7 +7915,7 @@
           <a:bodyPr wrap="square" lIns="0" tIns="0" rIns="0" bIns="0" rtlCol="0" anchor="t"/>
           <a:lstStyle/>
           <a:p>
-            <a:pPr algn="l" indent="0" marL="0">
+            <a:pPr marL="0" indent="0" algn="l">
               <a:buNone/>
             </a:pPr>
             <a:r>
@@ -7863,7 +7953,7 @@
           </a:prstGeom>
           <a:extLst>
             <a:ext uri="{C572A759-6A51-4108-AA02-DFA0A04FC94B}">
-              <ma14:wrappingTextBoxFlag xmlns:ma14="http://schemas.microsoft.com/office/mac/drawingml/2011/main" val="0"/>
+              <ma14:wrappingTextBoxFlag xmlns:ma14="http://schemas.microsoft.com/office/mac/drawingml/2011/main" xmlns="" val="0"/>
             </a:ext>
           </a:extLst>
         </p:spPr>
@@ -7884,7 +7974,7 @@
           <a:p>
             <a:pPr algn="r"/>
             <a:fld id="{F7021451-1387-4CA6-816F-3879F97B5CBC}" type="slidenum">
-              <a:rPr b="0" lang="en-US"/>
+              <a:rPr lang="en-US" b="0"/>
               <a:t>6</a:t>
             </a:fld>
             <a:endParaRPr lang="en-US"/>
@@ -7919,9 +8009,11 @@
       <p:sp>
         <p:nvSpPr>
           <p:cNvPr id="2" name="Text 0"/>
-          <p:cNvSpPr/>
+          <p:cNvSpPr>
+            <a:spLocks noGrp="1"/>
+          </p:cNvSpPr>
           <p:nvPr>
-            <p:ph idx="100" type="title" hasCustomPrompt="1"/>
+            <p:ph type="title" idx="100" hasCustomPrompt="1"/>
           </p:nvPr>
         </p:nvSpPr>
         <p:spPr>
@@ -7939,7 +8031,7 @@
           <a:bodyPr wrap="square" lIns="0" tIns="0" rIns="0" bIns="0" rtlCol="0" anchor="ctr"/>
           <a:lstStyle/>
           <a:p>
-            <a:pPr algn="l" indent="0" marL="0">
+            <a:pPr marL="0" indent="0" algn="l">
               <a:buNone/>
             </a:pPr>
             <a:r>
@@ -7978,7 +8070,7 @@
           <a:bodyPr wrap="square" lIns="0" tIns="0" rIns="0" bIns="0" rtlCol="0" anchor="ctr"/>
           <a:lstStyle/>
           <a:p>
-            <a:pPr algn="l" indent="0" marL="0">
+            <a:pPr marL="0" indent="0" algn="l">
               <a:buNone/>
             </a:pPr>
             <a:r>
@@ -8020,6 +8112,13 @@
             <a:prstDash val="solid"/>
           </a:ln>
         </p:spPr>
+        <p:txBody>
+          <a:bodyPr/>
+          <a:lstStyle/>
+          <a:p>
+            <a:endParaRPr lang="en-US"/>
+          </a:p>
+        </p:txBody>
       </p:sp>
       <p:sp>
         <p:nvSpPr>
@@ -8043,6 +8142,13 @@
             <a:prstDash val="solid"/>
           </a:ln>
         </p:spPr>
+        <p:txBody>
+          <a:bodyPr/>
+          <a:lstStyle/>
+          <a:p>
+            <a:endParaRPr lang="en-US"/>
+          </a:p>
+        </p:txBody>
       </p:sp>
       <p:sp>
         <p:nvSpPr>
@@ -8066,6 +8172,13 @@
             <a:prstDash val="solid"/>
           </a:ln>
         </p:spPr>
+        <p:txBody>
+          <a:bodyPr/>
+          <a:lstStyle/>
+          <a:p>
+            <a:endParaRPr lang="en-US"/>
+          </a:p>
+        </p:txBody>
       </p:sp>
       <p:sp>
         <p:nvSpPr>
@@ -8089,6 +8202,13 @@
             <a:prstDash val="solid"/>
           </a:ln>
         </p:spPr>
+        <p:txBody>
+          <a:bodyPr/>
+          <a:lstStyle/>
+          <a:p>
+            <a:endParaRPr lang="en-US"/>
+          </a:p>
+        </p:txBody>
       </p:sp>
       <p:sp>
         <p:nvSpPr>
@@ -8111,7 +8231,7 @@
           <a:bodyPr wrap="square" lIns="0" tIns="0" rIns="0" bIns="0" rtlCol="0" anchor="ctr"/>
           <a:lstStyle/>
           <a:p>
-            <a:pPr algn="l" indent="0" marL="0">
+            <a:pPr marL="0" indent="0" algn="l">
               <a:buNone/>
             </a:pPr>
             <a:r>
@@ -8125,9 +8245,6 @@
               </a:rPr>
               <a:t>0.649</a:t>
             </a:r>
-            <a:pPr algn="l" indent="0" marL="0">
-              <a:buNone/>
-            </a:pPr>
             <a:r>
               <a:rPr lang="en-US" sz="1400" dirty="0">
                 <a:solidFill>
@@ -8164,7 +8281,7 @@
           <a:bodyPr wrap="square" lIns="0" tIns="0" rIns="0" bIns="0" rtlCol="0" anchor="ctr"/>
           <a:lstStyle/>
           <a:p>
-            <a:pPr algn="l" indent="0" marL="0">
+            <a:pPr marL="0" indent="0" algn="l">
               <a:buNone/>
             </a:pPr>
             <a:r>
@@ -8206,6 +8323,13 @@
             <a:prstDash val="solid"/>
           </a:ln>
         </p:spPr>
+        <p:txBody>
+          <a:bodyPr/>
+          <a:lstStyle/>
+          <a:p>
+            <a:endParaRPr lang="en-US"/>
+          </a:p>
+        </p:txBody>
       </p:sp>
       <p:sp>
         <p:nvSpPr>
@@ -8229,6 +8353,13 @@
             <a:prstDash val="solid"/>
           </a:ln>
         </p:spPr>
+        <p:txBody>
+          <a:bodyPr/>
+          <a:lstStyle/>
+          <a:p>
+            <a:endParaRPr lang="en-US"/>
+          </a:p>
+        </p:txBody>
       </p:sp>
       <p:sp>
         <p:nvSpPr>
@@ -8252,6 +8383,13 @@
             <a:prstDash val="solid"/>
           </a:ln>
         </p:spPr>
+        <p:txBody>
+          <a:bodyPr/>
+          <a:lstStyle/>
+          <a:p>
+            <a:endParaRPr lang="en-US"/>
+          </a:p>
+        </p:txBody>
       </p:sp>
       <p:sp>
         <p:nvSpPr>
@@ -8275,6 +8413,13 @@
             <a:prstDash val="solid"/>
           </a:ln>
         </p:spPr>
+        <p:txBody>
+          <a:bodyPr/>
+          <a:lstStyle/>
+          <a:p>
+            <a:endParaRPr lang="en-US"/>
+          </a:p>
+        </p:txBody>
       </p:sp>
       <p:sp>
         <p:nvSpPr>
@@ -8298,6 +8443,13 @@
             <a:prstDash val="solid"/>
           </a:ln>
         </p:spPr>
+        <p:txBody>
+          <a:bodyPr/>
+          <a:lstStyle/>
+          <a:p>
+            <a:endParaRPr lang="en-US"/>
+          </a:p>
+        </p:txBody>
       </p:sp>
       <p:sp>
         <p:nvSpPr>
@@ -8320,7 +8472,7 @@
           <a:bodyPr wrap="square" lIns="0" tIns="0" rIns="0" bIns="0" rtlCol="0" anchor="ctr"/>
           <a:lstStyle/>
           <a:p>
-            <a:pPr algn="l" indent="0" marL="0">
+            <a:pPr marL="0" indent="0" algn="l">
               <a:buNone/>
             </a:pPr>
             <a:r>
@@ -8334,9 +8486,6 @@
               </a:rPr>
               <a:t>0.692</a:t>
             </a:r>
-            <a:pPr algn="l" indent="0" marL="0">
-              <a:buNone/>
-            </a:pPr>
             <a:r>
               <a:rPr lang="en-US" sz="1400" dirty="0">
                 <a:solidFill>
@@ -8373,7 +8522,7 @@
           <a:bodyPr wrap="square" lIns="0" tIns="0" rIns="0" bIns="0" rtlCol="0" anchor="ctr"/>
           <a:lstStyle/>
           <a:p>
-            <a:pPr algn="l" indent="0" marL="0">
+            <a:pPr marL="0" indent="0" algn="l">
               <a:buNone/>
             </a:pPr>
             <a:r>
@@ -8415,6 +8564,13 @@
             <a:prstDash val="solid"/>
           </a:ln>
         </p:spPr>
+        <p:txBody>
+          <a:bodyPr/>
+          <a:lstStyle/>
+          <a:p>
+            <a:endParaRPr lang="en-US"/>
+          </a:p>
+        </p:txBody>
       </p:sp>
       <p:sp>
         <p:nvSpPr>
@@ -8438,6 +8594,13 @@
             <a:prstDash val="solid"/>
           </a:ln>
         </p:spPr>
+        <p:txBody>
+          <a:bodyPr/>
+          <a:lstStyle/>
+          <a:p>
+            <a:endParaRPr lang="en-US"/>
+          </a:p>
+        </p:txBody>
       </p:sp>
       <p:sp>
         <p:nvSpPr>
@@ -8461,6 +8624,13 @@
             <a:prstDash val="solid"/>
           </a:ln>
         </p:spPr>
+        <p:txBody>
+          <a:bodyPr/>
+          <a:lstStyle/>
+          <a:p>
+            <a:endParaRPr lang="en-US"/>
+          </a:p>
+        </p:txBody>
       </p:sp>
       <p:sp>
         <p:nvSpPr>
@@ -8484,6 +8654,13 @@
             <a:prstDash val="solid"/>
           </a:ln>
         </p:spPr>
+        <p:txBody>
+          <a:bodyPr/>
+          <a:lstStyle/>
+          <a:p>
+            <a:endParaRPr lang="en-US"/>
+          </a:p>
+        </p:txBody>
       </p:sp>
       <p:sp>
         <p:nvSpPr>
@@ -8507,6 +8684,13 @@
             <a:prstDash val="solid"/>
           </a:ln>
         </p:spPr>
+        <p:txBody>
+          <a:bodyPr/>
+          <a:lstStyle/>
+          <a:p>
+            <a:endParaRPr lang="en-US"/>
+          </a:p>
+        </p:txBody>
       </p:sp>
       <p:sp>
         <p:nvSpPr>
@@ -8529,7 +8713,7 @@
           <a:bodyPr wrap="square" lIns="0" tIns="0" rIns="0" bIns="0" rtlCol="0" anchor="ctr"/>
           <a:lstStyle/>
           <a:p>
-            <a:pPr algn="l" indent="0" marL="0">
+            <a:pPr marL="0" indent="0" algn="l">
               <a:buNone/>
             </a:pPr>
             <a:r>
@@ -8543,9 +8727,6 @@
               </a:rPr>
               <a:t>0.658</a:t>
             </a:r>
-            <a:pPr algn="l" indent="0" marL="0">
-              <a:buNone/>
-            </a:pPr>
             <a:r>
               <a:rPr lang="en-US" sz="1400" dirty="0">
                 <a:solidFill>
@@ -8582,7 +8763,7 @@
           <a:bodyPr wrap="square" lIns="0" tIns="0" rIns="0" bIns="0" rtlCol="0" anchor="ctr"/>
           <a:lstStyle/>
           <a:p>
-            <a:pPr algn="l" indent="0" marL="0">
+            <a:pPr marL="0" indent="0" algn="l">
               <a:buNone/>
             </a:pPr>
             <a:r>
@@ -8624,6 +8805,13 @@
             <a:prstDash val="solid"/>
           </a:ln>
         </p:spPr>
+        <p:txBody>
+          <a:bodyPr/>
+          <a:lstStyle/>
+          <a:p>
+            <a:endParaRPr lang="en-US"/>
+          </a:p>
+        </p:txBody>
       </p:sp>
       <p:sp>
         <p:nvSpPr>
@@ -8647,6 +8835,13 @@
             <a:prstDash val="solid"/>
           </a:ln>
         </p:spPr>
+        <p:txBody>
+          <a:bodyPr/>
+          <a:lstStyle/>
+          <a:p>
+            <a:endParaRPr lang="en-US"/>
+          </a:p>
+        </p:txBody>
       </p:sp>
       <p:sp>
         <p:nvSpPr>
@@ -8670,6 +8865,13 @@
             <a:prstDash val="solid"/>
           </a:ln>
         </p:spPr>
+        <p:txBody>
+          <a:bodyPr/>
+          <a:lstStyle/>
+          <a:p>
+            <a:endParaRPr lang="en-US"/>
+          </a:p>
+        </p:txBody>
       </p:sp>
       <p:sp>
         <p:nvSpPr>
@@ -8693,6 +8895,13 @@
             <a:prstDash val="solid"/>
           </a:ln>
         </p:spPr>
+        <p:txBody>
+          <a:bodyPr/>
+          <a:lstStyle/>
+          <a:p>
+            <a:endParaRPr lang="en-US"/>
+          </a:p>
+        </p:txBody>
       </p:sp>
       <p:sp>
         <p:nvSpPr>
@@ -8716,6 +8925,13 @@
             <a:prstDash val="solid"/>
           </a:ln>
         </p:spPr>
+        <p:txBody>
+          <a:bodyPr/>
+          <a:lstStyle/>
+          <a:p>
+            <a:endParaRPr lang="en-US"/>
+          </a:p>
+        </p:txBody>
       </p:sp>
       <p:sp>
         <p:nvSpPr>
@@ -8738,7 +8954,7 @@
           <a:bodyPr wrap="square" lIns="0" tIns="0" rIns="0" bIns="0" rtlCol="0" anchor="ctr"/>
           <a:lstStyle/>
           <a:p>
-            <a:pPr algn="l" indent="0" marL="0">
+            <a:pPr marL="0" indent="0" algn="l">
               <a:buNone/>
             </a:pPr>
             <a:r>
@@ -8752,9 +8968,6 @@
               </a:rPr>
               <a:t>0.845</a:t>
             </a:r>
-            <a:pPr algn="l" indent="0" marL="0">
-              <a:buNone/>
-            </a:pPr>
             <a:r>
               <a:rPr lang="en-US" sz="1400" dirty="0">
                 <a:solidFill>
@@ -8791,7 +9004,7 @@
           <a:bodyPr wrap="square" lIns="0" tIns="0" rIns="0" bIns="0" rtlCol="0" anchor="ctr"/>
           <a:lstStyle/>
           <a:p>
-            <a:pPr algn="l" indent="0" marL="0">
+            <a:pPr marL="0" indent="0" algn="l">
               <a:buNone/>
             </a:pPr>
             <a:r>
@@ -8833,6 +9046,13 @@
             <a:prstDash val="solid"/>
           </a:ln>
         </p:spPr>
+        <p:txBody>
+          <a:bodyPr/>
+          <a:lstStyle/>
+          <a:p>
+            <a:endParaRPr lang="en-US"/>
+          </a:p>
+        </p:txBody>
       </p:sp>
       <p:sp>
         <p:nvSpPr>
@@ -8856,6 +9076,13 @@
             <a:prstDash val="solid"/>
           </a:ln>
         </p:spPr>
+        <p:txBody>
+          <a:bodyPr/>
+          <a:lstStyle/>
+          <a:p>
+            <a:endParaRPr lang="en-US"/>
+          </a:p>
+        </p:txBody>
       </p:sp>
       <p:sp>
         <p:nvSpPr>
@@ -8879,6 +9106,13 @@
             <a:prstDash val="solid"/>
           </a:ln>
         </p:spPr>
+        <p:txBody>
+          <a:bodyPr/>
+          <a:lstStyle/>
+          <a:p>
+            <a:endParaRPr lang="en-US"/>
+          </a:p>
+        </p:txBody>
       </p:sp>
       <p:sp>
         <p:nvSpPr>
@@ -8902,6 +9136,13 @@
             <a:prstDash val="solid"/>
           </a:ln>
         </p:spPr>
+        <p:txBody>
+          <a:bodyPr/>
+          <a:lstStyle/>
+          <a:p>
+            <a:endParaRPr lang="en-US"/>
+          </a:p>
+        </p:txBody>
       </p:sp>
       <p:sp>
         <p:nvSpPr>
@@ -8925,6 +9166,13 @@
             <a:prstDash val="solid"/>
           </a:ln>
         </p:spPr>
+        <p:txBody>
+          <a:bodyPr/>
+          <a:lstStyle/>
+          <a:p>
+            <a:endParaRPr lang="en-US"/>
+          </a:p>
+        </p:txBody>
       </p:sp>
       <p:sp>
         <p:nvSpPr>
@@ -8947,7 +9195,7 @@
           <a:bodyPr wrap="square" lIns="0" tIns="0" rIns="0" bIns="0" rtlCol="0" anchor="ctr"/>
           <a:lstStyle/>
           <a:p>
-            <a:pPr algn="l" indent="0" marL="0">
+            <a:pPr marL="0" indent="0" algn="l">
               <a:buNone/>
             </a:pPr>
             <a:r>
@@ -8961,9 +9209,6 @@
               </a:rPr>
               <a:t>0.893</a:t>
             </a:r>
-            <a:pPr algn="l" indent="0" marL="0">
-              <a:buNone/>
-            </a:pPr>
             <a:r>
               <a:rPr lang="en-US" sz="1400" dirty="0">
                 <a:solidFill>
@@ -9000,7 +9245,7 @@
           <a:bodyPr wrap="square" lIns="0" tIns="0" rIns="0" bIns="0" rtlCol="0" anchor="ctr"/>
           <a:lstStyle/>
           <a:p>
-            <a:pPr algn="l" indent="0" marL="0">
+            <a:pPr marL="0" indent="0" algn="l">
               <a:buNone/>
             </a:pPr>
             <a:r>
@@ -9042,6 +9287,13 @@
             <a:prstDash val="solid"/>
           </a:ln>
         </p:spPr>
+        <p:txBody>
+          <a:bodyPr/>
+          <a:lstStyle/>
+          <a:p>
+            <a:endParaRPr lang="en-US"/>
+          </a:p>
+        </p:txBody>
       </p:sp>
       <p:sp>
         <p:nvSpPr>
@@ -9065,6 +9317,13 @@
             <a:prstDash val="solid"/>
           </a:ln>
         </p:spPr>
+        <p:txBody>
+          <a:bodyPr/>
+          <a:lstStyle/>
+          <a:p>
+            <a:endParaRPr lang="en-US"/>
+          </a:p>
+        </p:txBody>
       </p:sp>
       <p:sp>
         <p:nvSpPr>
@@ -9088,6 +9347,13 @@
             <a:prstDash val="solid"/>
           </a:ln>
         </p:spPr>
+        <p:txBody>
+          <a:bodyPr/>
+          <a:lstStyle/>
+          <a:p>
+            <a:endParaRPr lang="en-US"/>
+          </a:p>
+        </p:txBody>
       </p:sp>
       <p:sp>
         <p:nvSpPr>
@@ -9111,6 +9377,13 @@
             <a:prstDash val="solid"/>
           </a:ln>
         </p:spPr>
+        <p:txBody>
+          <a:bodyPr/>
+          <a:lstStyle/>
+          <a:p>
+            <a:endParaRPr lang="en-US"/>
+          </a:p>
+        </p:txBody>
       </p:sp>
       <p:sp>
         <p:nvSpPr>
@@ -9134,6 +9407,13 @@
             <a:prstDash val="solid"/>
           </a:ln>
         </p:spPr>
+        <p:txBody>
+          <a:bodyPr/>
+          <a:lstStyle/>
+          <a:p>
+            <a:endParaRPr lang="en-US"/>
+          </a:p>
+        </p:txBody>
       </p:sp>
       <p:sp>
         <p:nvSpPr>
@@ -9156,7 +9436,7 @@
           <a:bodyPr wrap="square" lIns="0" tIns="0" rIns="0" bIns="0" rtlCol="0" anchor="ctr"/>
           <a:lstStyle/>
           <a:p>
-            <a:pPr algn="l" indent="0" marL="0">
+            <a:pPr marL="0" indent="0" algn="l">
               <a:buNone/>
             </a:pPr>
             <a:r>
@@ -9170,9 +9450,6 @@
               </a:rPr>
               <a:t>0.775</a:t>
             </a:r>
-            <a:pPr algn="l" indent="0" marL="0">
-              <a:buNone/>
-            </a:pPr>
             <a:r>
               <a:rPr lang="en-US" sz="1400" dirty="0">
                 <a:solidFill>
@@ -9210,6 +9487,13 @@
             <a:prstDash val="solid"/>
           </a:ln>
         </p:spPr>
+        <p:txBody>
+          <a:bodyPr/>
+          <a:lstStyle/>
+          <a:p>
+            <a:endParaRPr lang="en-US"/>
+          </a:p>
+        </p:txBody>
       </p:sp>
       <p:sp>
         <p:nvSpPr>
@@ -9232,7 +9516,7 @@
           <a:bodyPr wrap="square" lIns="0" tIns="0" rIns="0" bIns="0" rtlCol="0" anchor="t"/>
           <a:lstStyle/>
           <a:p>
-            <a:pPr algn="ctr" indent="0" marL="0">
+            <a:pPr marL="0" indent="0" algn="ctr">
               <a:buNone/>
             </a:pPr>
             <a:r>
@@ -9271,7 +9555,7 @@
           <a:bodyPr wrap="square" lIns="0" tIns="0" rIns="0" bIns="0" rtlCol="0" anchor="t"/>
           <a:lstStyle/>
           <a:p>
-            <a:pPr algn="ctr" indent="0" marL="0">
+            <a:pPr marL="0" indent="0" algn="ctr">
               <a:buNone/>
             </a:pPr>
             <a:r>
@@ -9310,7 +9594,7 @@
           <a:bodyPr wrap="square" lIns="0" tIns="0" rIns="0" bIns="0" rtlCol="0" anchor="t"/>
           <a:lstStyle/>
           <a:p>
-            <a:pPr algn="ctr" indent="0" marL="0">
+            <a:pPr marL="0" indent="0" algn="ctr">
               <a:buNone/>
             </a:pPr>
             <a:r>
@@ -9349,7 +9633,7 @@
           <a:bodyPr wrap="square" lIns="0" tIns="0" rIns="0" bIns="0" rtlCol="0" anchor="t"/>
           <a:lstStyle/>
           <a:p>
-            <a:pPr algn="l" indent="0" marL="0">
+            <a:pPr marL="0" indent="0" algn="l">
               <a:buNone/>
             </a:pPr>
             <a:r>
@@ -9388,7 +9672,7 @@
           <a:bodyPr wrap="square" lIns="0" tIns="0" rIns="0" bIns="0" rtlCol="0" anchor="t"/>
           <a:lstStyle/>
           <a:p>
-            <a:pPr algn="l" indent="0" marL="0">
+            <a:pPr marL="0" indent="0" algn="l">
               <a:buNone/>
             </a:pPr>
             <a:r>
@@ -9427,7 +9711,7 @@
           <a:bodyPr wrap="square" lIns="0" tIns="0" rIns="0" bIns="0" rtlCol="0" anchor="t"/>
           <a:lstStyle/>
           <a:p>
-            <a:pPr algn="l" indent="0" marL="0">
+            <a:pPr marL="0" indent="0" algn="l">
               <a:buNone/>
             </a:pPr>
             <a:r>
@@ -9447,7 +9731,7 @@
       </p:sp>
       <p:sp>
         <p:nvSpPr>
-          <p:cNvPr id="25" name="Slide Number Placeholder 0"/>
+          <p:cNvPr id="3" name="Slide Number Placeholder 0"/>
           <p:cNvSpPr>
             <a:spLocks noGrp="1"/>
           </p:cNvSpPr>
@@ -9465,7 +9749,7 @@
           </a:prstGeom>
           <a:extLst>
             <a:ext uri="{C572A759-6A51-4108-AA02-DFA0A04FC94B}">
-              <ma14:wrappingTextBoxFlag xmlns:ma14="http://schemas.microsoft.com/office/mac/drawingml/2011/main" val="0"/>
+              <ma14:wrappingTextBoxFlag xmlns:ma14="http://schemas.microsoft.com/office/mac/drawingml/2011/main" xmlns="" val="0"/>
             </a:ext>
           </a:extLst>
         </p:spPr>
@@ -9486,7 +9770,7 @@
           <a:p>
             <a:pPr algn="r"/>
             <a:fld id="{F7021451-1387-4CA6-816F-3879F97B5CBC}" type="slidenum">
-              <a:rPr b="0" lang="en-US"/>
+              <a:rPr lang="en-US" b="0"/>
               <a:t>7</a:t>
             </a:fld>
             <a:endParaRPr lang="en-US"/>
@@ -9521,9 +9805,11 @@
       <p:sp>
         <p:nvSpPr>
           <p:cNvPr id="2" name="Text 0"/>
-          <p:cNvSpPr/>
+          <p:cNvSpPr>
+            <a:spLocks noGrp="1"/>
+          </p:cNvSpPr>
           <p:nvPr>
-            <p:ph idx="100" type="title" hasCustomPrompt="1"/>
+            <p:ph type="title" idx="100" hasCustomPrompt="1"/>
           </p:nvPr>
         </p:nvSpPr>
         <p:spPr>
@@ -9541,7 +9827,7 @@
           <a:bodyPr wrap="square" lIns="0" tIns="0" rIns="0" bIns="0" rtlCol="0" anchor="ctr"/>
           <a:lstStyle/>
           <a:p>
-            <a:pPr algn="l" indent="0" marL="0">
+            <a:pPr marL="0" indent="0" algn="l">
               <a:buNone/>
             </a:pPr>
             <a:r>
@@ -9580,7 +9866,7 @@
           <a:bodyPr wrap="square" lIns="0" tIns="0" rIns="0" bIns="0" rtlCol="0" anchor="t"/>
           <a:lstStyle/>
           <a:p>
-            <a:pPr algn="l" indent="0" marL="0">
+            <a:pPr marL="0" indent="0" algn="l">
               <a:buNone/>
             </a:pPr>
             <a:r>
@@ -9619,7 +9905,7 @@
           <a:bodyPr wrap="square" lIns="0" tIns="0" rIns="0" bIns="0" rtlCol="0" anchor="ctr"/>
           <a:lstStyle/>
           <a:p>
-            <a:pPr algn="l" indent="0" marL="0">
+            <a:pPr marL="0" indent="0" algn="l">
               <a:buNone/>
             </a:pPr>
             <a:r>
@@ -9659,6 +9945,13 @@
             <a:prstDash val="solid"/>
           </a:ln>
         </p:spPr>
+        <p:txBody>
+          <a:bodyPr/>
+          <a:lstStyle/>
+          <a:p>
+            <a:endParaRPr lang="en-US"/>
+          </a:p>
+        </p:txBody>
       </p:sp>
       <p:sp>
         <p:nvSpPr>
@@ -9684,6 +9977,13 @@
             <a:prstDash val="solid"/>
           </a:ln>
         </p:spPr>
+        <p:txBody>
+          <a:bodyPr/>
+          <a:lstStyle/>
+          <a:p>
+            <a:endParaRPr lang="en-US"/>
+          </a:p>
+        </p:txBody>
       </p:sp>
       <p:sp>
         <p:nvSpPr>
@@ -9706,7 +10006,7 @@
           <a:bodyPr wrap="square" lIns="0" tIns="0" rIns="0" bIns="0" rtlCol="0" anchor="ctr"/>
           <a:lstStyle/>
           <a:p>
-            <a:pPr algn="l" indent="0" marL="0">
+            <a:pPr marL="0" indent="0" algn="l">
               <a:buNone/>
             </a:pPr>
             <a:r>
@@ -9720,9 +10020,6 @@
               </a:rPr>
               <a:t>+0.187</a:t>
             </a:r>
-            <a:pPr algn="l" indent="0" marL="0">
-              <a:buNone/>
-            </a:pPr>
             <a:r>
               <a:rPr lang="en-US" sz="1400" dirty="0">
                 <a:solidFill>
@@ -9759,7 +10056,7 @@
           <a:bodyPr wrap="square" lIns="0" tIns="0" rIns="0" bIns="0" rtlCol="0" anchor="ctr"/>
           <a:lstStyle/>
           <a:p>
-            <a:pPr algn="l" indent="0" marL="0">
+            <a:pPr marL="0" indent="0" algn="l">
               <a:buNone/>
             </a:pPr>
             <a:r>
@@ -9799,6 +10096,13 @@
             <a:prstDash val="solid"/>
           </a:ln>
         </p:spPr>
+        <p:txBody>
+          <a:bodyPr/>
+          <a:lstStyle/>
+          <a:p>
+            <a:endParaRPr lang="en-US"/>
+          </a:p>
+        </p:txBody>
       </p:sp>
       <p:sp>
         <p:nvSpPr>
@@ -9824,6 +10128,13 @@
             <a:prstDash val="solid"/>
           </a:ln>
         </p:spPr>
+        <p:txBody>
+          <a:bodyPr/>
+          <a:lstStyle/>
+          <a:p>
+            <a:endParaRPr lang="en-US"/>
+          </a:p>
+        </p:txBody>
       </p:sp>
       <p:sp>
         <p:nvSpPr>
@@ -9846,7 +10157,7 @@
           <a:bodyPr wrap="square" lIns="0" tIns="0" rIns="0" bIns="0" rtlCol="0" anchor="ctr"/>
           <a:lstStyle/>
           <a:p>
-            <a:pPr algn="l" indent="0" marL="0">
+            <a:pPr marL="0" indent="0" algn="l">
               <a:buNone/>
             </a:pPr>
             <a:r>
@@ -9860,9 +10171,6 @@
               </a:rPr>
               <a:t>+0.235</a:t>
             </a:r>
-            <a:pPr algn="l" indent="0" marL="0">
-              <a:buNone/>
-            </a:pPr>
             <a:r>
               <a:rPr lang="en-US" sz="1400" dirty="0">
                 <a:solidFill>
@@ -9899,7 +10207,7 @@
           <a:bodyPr wrap="square" lIns="0" tIns="0" rIns="0" bIns="0" rtlCol="0" anchor="ctr"/>
           <a:lstStyle/>
           <a:p>
-            <a:pPr algn="l" indent="0" marL="0">
+            <a:pPr marL="0" indent="0" algn="l">
               <a:buNone/>
             </a:pPr>
             <a:r>
@@ -9939,6 +10247,13 @@
             <a:prstDash val="solid"/>
           </a:ln>
         </p:spPr>
+        <p:txBody>
+          <a:bodyPr/>
+          <a:lstStyle/>
+          <a:p>
+            <a:endParaRPr lang="en-US"/>
+          </a:p>
+        </p:txBody>
       </p:sp>
       <p:sp>
         <p:nvSpPr>
@@ -9964,6 +10279,13 @@
             <a:prstDash val="solid"/>
           </a:ln>
         </p:spPr>
+        <p:txBody>
+          <a:bodyPr/>
+          <a:lstStyle/>
+          <a:p>
+            <a:endParaRPr lang="en-US"/>
+          </a:p>
+        </p:txBody>
       </p:sp>
       <p:sp>
         <p:nvSpPr>
@@ -9986,7 +10308,7 @@
           <a:bodyPr wrap="square" lIns="0" tIns="0" rIns="0" bIns="0" rtlCol="0" anchor="ctr"/>
           <a:lstStyle/>
           <a:p>
-            <a:pPr algn="l" indent="0" marL="0">
+            <a:pPr marL="0" indent="0" algn="l">
               <a:buNone/>
             </a:pPr>
             <a:r>
@@ -10000,9 +10322,6 @@
               </a:rPr>
               <a:t>−0.118</a:t>
             </a:r>
-            <a:pPr algn="l" indent="0" marL="0">
-              <a:buNone/>
-            </a:pPr>
             <a:r>
               <a:rPr lang="en-US" sz="1400" dirty="0">
                 <a:solidFill>
@@ -10039,7 +10358,7 @@
           <a:bodyPr wrap="square" lIns="0" tIns="0" rIns="0" bIns="0" rtlCol="0" anchor="ctr"/>
           <a:lstStyle/>
           <a:p>
-            <a:pPr algn="l" indent="0" marL="0">
+            <a:pPr marL="0" indent="0" algn="l">
               <a:buNone/>
             </a:pPr>
             <a:r>
@@ -10079,6 +10398,13 @@
             <a:prstDash val="solid"/>
           </a:ln>
         </p:spPr>
+        <p:txBody>
+          <a:bodyPr/>
+          <a:lstStyle/>
+          <a:p>
+            <a:endParaRPr lang="en-US"/>
+          </a:p>
+        </p:txBody>
       </p:sp>
       <p:sp>
         <p:nvSpPr>
@@ -10104,6 +10430,13 @@
             <a:prstDash val="solid"/>
           </a:ln>
         </p:spPr>
+        <p:txBody>
+          <a:bodyPr/>
+          <a:lstStyle/>
+          <a:p>
+            <a:endParaRPr lang="en-US"/>
+          </a:p>
+        </p:txBody>
       </p:sp>
       <p:sp>
         <p:nvSpPr>
@@ -10126,7 +10459,7 @@
           <a:bodyPr wrap="square" lIns="0" tIns="0" rIns="0" bIns="0" rtlCol="0" anchor="ctr"/>
           <a:lstStyle/>
           <a:p>
-            <a:pPr algn="l" indent="0" marL="0">
+            <a:pPr marL="0" indent="0" algn="l">
               <a:buNone/>
             </a:pPr>
             <a:r>
@@ -10140,9 +10473,6 @@
               </a:rPr>
               <a:t>+0.117</a:t>
             </a:r>
-            <a:pPr algn="l" indent="0" marL="0">
-              <a:buNone/>
-            </a:pPr>
             <a:r>
               <a:rPr lang="en-US" sz="1400" dirty="0">
                 <a:solidFill>
@@ -10179,7 +10509,7 @@
           <a:bodyPr wrap="square" lIns="0" tIns="0" rIns="0" bIns="0" rtlCol="0" anchor="t"/>
           <a:lstStyle/>
           <a:p>
-            <a:pPr algn="l" indent="0" marL="0">
+            <a:pPr marL="0" indent="0" algn="l">
               <a:buNone/>
             </a:pPr>
             <a:r>
@@ -10218,7 +10548,7 @@
           <a:bodyPr wrap="square" lIns="0" tIns="0" rIns="0" bIns="0" rtlCol="0" anchor="ctr"/>
           <a:lstStyle/>
           <a:p>
-            <a:pPr algn="l" indent="0" marL="0">
+            <a:pPr marL="0" indent="0" algn="l">
               <a:buNone/>
             </a:pPr>
             <a:r>
@@ -10258,6 +10588,13 @@
             <a:prstDash val="solid"/>
           </a:ln>
         </p:spPr>
+        <p:txBody>
+          <a:bodyPr/>
+          <a:lstStyle/>
+          <a:p>
+            <a:endParaRPr lang="en-US"/>
+          </a:p>
+        </p:txBody>
       </p:sp>
       <p:sp>
         <p:nvSpPr>
@@ -10283,6 +10620,13 @@
             <a:prstDash val="solid"/>
           </a:ln>
         </p:spPr>
+        <p:txBody>
+          <a:bodyPr/>
+          <a:lstStyle/>
+          <a:p>
+            <a:endParaRPr lang="en-US"/>
+          </a:p>
+        </p:txBody>
       </p:sp>
       <p:sp>
         <p:nvSpPr>
@@ -10305,7 +10649,7 @@
           <a:bodyPr wrap="square" lIns="0" tIns="0" rIns="0" bIns="0" rtlCol="0" anchor="ctr"/>
           <a:lstStyle/>
           <a:p>
-            <a:pPr algn="l" indent="0" marL="0">
+            <a:pPr marL="0" indent="0" algn="l">
               <a:buNone/>
             </a:pPr>
             <a:r>
@@ -10319,9 +10663,6 @@
               </a:rPr>
               <a:t>+0.043</a:t>
             </a:r>
-            <a:pPr algn="l" indent="0" marL="0">
-              <a:buNone/>
-            </a:pPr>
             <a:r>
               <a:rPr lang="en-US" sz="1400" dirty="0">
                 <a:solidFill>
@@ -10358,7 +10699,7 @@
           <a:bodyPr wrap="square" lIns="0" tIns="0" rIns="0" bIns="0" rtlCol="0" anchor="ctr"/>
           <a:lstStyle/>
           <a:p>
-            <a:pPr algn="l" indent="0" marL="0">
+            <a:pPr marL="0" indent="0" algn="l">
               <a:buNone/>
             </a:pPr>
             <a:r>
@@ -10398,6 +10739,13 @@
             <a:prstDash val="solid"/>
           </a:ln>
         </p:spPr>
+        <p:txBody>
+          <a:bodyPr/>
+          <a:lstStyle/>
+          <a:p>
+            <a:endParaRPr lang="en-US"/>
+          </a:p>
+        </p:txBody>
       </p:sp>
       <p:sp>
         <p:nvSpPr>
@@ -10423,6 +10771,13 @@
             <a:prstDash val="solid"/>
           </a:ln>
         </p:spPr>
+        <p:txBody>
+          <a:bodyPr/>
+          <a:lstStyle/>
+          <a:p>
+            <a:endParaRPr lang="en-US"/>
+          </a:p>
+        </p:txBody>
       </p:sp>
       <p:sp>
         <p:nvSpPr>
@@ -10445,7 +10800,7 @@
           <a:bodyPr wrap="square" lIns="0" tIns="0" rIns="0" bIns="0" rtlCol="0" anchor="ctr"/>
           <a:lstStyle/>
           <a:p>
-            <a:pPr algn="l" indent="0" marL="0">
+            <a:pPr marL="0" indent="0" algn="l">
               <a:buNone/>
             </a:pPr>
             <a:r>
@@ -10459,9 +10814,6 @@
               </a:rPr>
               <a:t>−0.034</a:t>
             </a:r>
-            <a:pPr algn="l" indent="0" marL="0">
-              <a:buNone/>
-            </a:pPr>
             <a:r>
               <a:rPr lang="en-US" sz="1400" dirty="0">
                 <a:solidFill>
@@ -10498,7 +10850,7 @@
           <a:bodyPr wrap="square" lIns="0" tIns="0" rIns="0" bIns="0" rtlCol="0" anchor="ctr"/>
           <a:lstStyle/>
           <a:p>
-            <a:pPr algn="l" indent="0" marL="0">
+            <a:pPr marL="0" indent="0" algn="l">
               <a:buNone/>
             </a:pPr>
             <a:r>
@@ -10538,6 +10890,13 @@
             <a:prstDash val="solid"/>
           </a:ln>
         </p:spPr>
+        <p:txBody>
+          <a:bodyPr/>
+          <a:lstStyle/>
+          <a:p>
+            <a:endParaRPr lang="en-US"/>
+          </a:p>
+        </p:txBody>
       </p:sp>
       <p:sp>
         <p:nvSpPr>
@@ -10563,6 +10922,13 @@
             <a:prstDash val="solid"/>
           </a:ln>
         </p:spPr>
+        <p:txBody>
+          <a:bodyPr/>
+          <a:lstStyle/>
+          <a:p>
+            <a:endParaRPr lang="en-US"/>
+          </a:p>
+        </p:txBody>
       </p:sp>
       <p:sp>
         <p:nvSpPr>
@@ -10585,7 +10951,7 @@
           <a:bodyPr wrap="square" lIns="0" tIns="0" rIns="0" bIns="0" rtlCol="0" anchor="ctr"/>
           <a:lstStyle/>
           <a:p>
-            <a:pPr algn="l" indent="0" marL="0">
+            <a:pPr marL="0" indent="0" algn="l">
               <a:buNone/>
             </a:pPr>
             <a:r>
@@ -10599,9 +10965,6 @@
               </a:rPr>
               <a:t>+0.048</a:t>
             </a:r>
-            <a:pPr algn="l" indent="0" marL="0">
-              <a:buNone/>
-            </a:pPr>
             <a:r>
               <a:rPr lang="en-US" sz="1400" dirty="0">
                 <a:solidFill>
@@ -10638,7 +11001,7 @@
           <a:bodyPr wrap="square" lIns="0" tIns="0" rIns="0" bIns="0" rtlCol="0" anchor="ctr"/>
           <a:lstStyle/>
           <a:p>
-            <a:pPr algn="l" indent="0" marL="0">
+            <a:pPr marL="0" indent="0" algn="l">
               <a:buNone/>
             </a:pPr>
             <a:r>
@@ -10678,6 +11041,13 @@
             <a:prstDash val="solid"/>
           </a:ln>
         </p:spPr>
+        <p:txBody>
+          <a:bodyPr/>
+          <a:lstStyle/>
+          <a:p>
+            <a:endParaRPr lang="en-US"/>
+          </a:p>
+        </p:txBody>
       </p:sp>
       <p:sp>
         <p:nvSpPr>
@@ -10703,6 +11073,13 @@
             <a:prstDash val="solid"/>
           </a:ln>
         </p:spPr>
+        <p:txBody>
+          <a:bodyPr/>
+          <a:lstStyle/>
+          <a:p>
+            <a:endParaRPr lang="en-US"/>
+          </a:p>
+        </p:txBody>
       </p:sp>
       <p:sp>
         <p:nvSpPr>
@@ -10725,7 +11102,7 @@
           <a:bodyPr wrap="square" lIns="0" tIns="0" rIns="0" bIns="0" rtlCol="0" anchor="ctr"/>
           <a:lstStyle/>
           <a:p>
-            <a:pPr algn="l" indent="0" marL="0">
+            <a:pPr marL="0" indent="0" algn="l">
               <a:buNone/>
             </a:pPr>
             <a:r>
@@ -10739,9 +11116,6 @@
               </a:rPr>
               <a:t>−0.070</a:t>
             </a:r>
-            <a:pPr algn="l" indent="0" marL="0">
-              <a:buNone/>
-            </a:pPr>
             <a:r>
               <a:rPr lang="en-US" sz="1400" dirty="0">
                 <a:solidFill>
@@ -10779,6 +11153,13 @@
             <a:prstDash val="solid"/>
           </a:ln>
         </p:spPr>
+        <p:txBody>
+          <a:bodyPr/>
+          <a:lstStyle/>
+          <a:p>
+            <a:endParaRPr lang="en-US"/>
+          </a:p>
+        </p:txBody>
       </p:sp>
       <p:sp>
         <p:nvSpPr>
@@ -10801,7 +11182,7 @@
           <a:bodyPr wrap="square" lIns="0" tIns="0" rIns="0" bIns="0" rtlCol="0" anchor="t"/>
           <a:lstStyle/>
           <a:p>
-            <a:pPr algn="ctr" indent="0" marL="0">
+            <a:pPr marL="0" indent="0" algn="ctr">
               <a:buNone/>
             </a:pPr>
             <a:r>
@@ -10840,7 +11221,7 @@
           <a:bodyPr wrap="square" lIns="0" tIns="0" rIns="0" bIns="0" rtlCol="0" anchor="t"/>
           <a:lstStyle/>
           <a:p>
-            <a:pPr algn="ctr" indent="0" marL="0">
+            <a:pPr marL="0" indent="0" algn="ctr">
               <a:buNone/>
             </a:pPr>
             <a:r>
@@ -10879,7 +11260,7 @@
           <a:bodyPr wrap="square" lIns="0" tIns="0" rIns="0" bIns="0" rtlCol="0" anchor="t"/>
           <a:lstStyle/>
           <a:p>
-            <a:pPr algn="ctr" indent="0" marL="0">
+            <a:pPr marL="0" indent="0" algn="ctr">
               <a:buNone/>
             </a:pPr>
             <a:r>
@@ -10918,7 +11299,7 @@
           <a:bodyPr wrap="square" lIns="0" tIns="0" rIns="0" bIns="0" rtlCol="0" anchor="t"/>
           <a:lstStyle/>
           <a:p>
-            <a:pPr algn="ctr" indent="0" marL="0">
+            <a:pPr marL="0" indent="0" algn="ctr">
               <a:buNone/>
             </a:pPr>
             <a:r>
@@ -10957,7 +11338,7 @@
           <a:bodyPr wrap="square" lIns="0" tIns="0" rIns="0" bIns="0" rtlCol="0" anchor="t"/>
           <a:lstStyle/>
           <a:p>
-            <a:pPr algn="l" indent="0" marL="0">
+            <a:pPr marL="0" indent="0" algn="l">
               <a:buNone/>
             </a:pPr>
             <a:r>
@@ -10996,7 +11377,7 @@
           <a:bodyPr wrap="square" lIns="0" tIns="0" rIns="0" bIns="0" rtlCol="0" anchor="t"/>
           <a:lstStyle/>
           <a:p>
-            <a:pPr algn="l" indent="0" marL="0">
+            <a:pPr marL="0" indent="0" algn="l">
               <a:buNone/>
             </a:pPr>
             <a:r>
@@ -11016,7 +11397,7 @@
       </p:sp>
       <p:sp>
         <p:nvSpPr>
-          <p:cNvPr id="25" name="Slide Number Placeholder 0"/>
+          <p:cNvPr id="3" name="Slide Number Placeholder 0"/>
           <p:cNvSpPr>
             <a:spLocks noGrp="1"/>
           </p:cNvSpPr>
@@ -11034,7 +11415,7 @@
           </a:prstGeom>
           <a:extLst>
             <a:ext uri="{C572A759-6A51-4108-AA02-DFA0A04FC94B}">
-              <ma14:wrappingTextBoxFlag xmlns:ma14="http://schemas.microsoft.com/office/mac/drawingml/2011/main" val="0"/>
+              <ma14:wrappingTextBoxFlag xmlns:ma14="http://schemas.microsoft.com/office/mac/drawingml/2011/main" xmlns="" val="0"/>
             </a:ext>
           </a:extLst>
         </p:spPr>
@@ -11055,7 +11436,7 @@
           <a:p>
             <a:pPr algn="r"/>
             <a:fld id="{F7021451-1387-4CA6-816F-3879F97B5CBC}" type="slidenum">
-              <a:rPr b="0" lang="en-US"/>
+              <a:rPr lang="en-US" b="0"/>
               <a:t>8</a:t>
             </a:fld>
             <a:endParaRPr lang="en-US"/>
@@ -11090,9 +11471,11 @@
       <p:sp>
         <p:nvSpPr>
           <p:cNvPr id="2" name="Text 0"/>
-          <p:cNvSpPr/>
+          <p:cNvSpPr>
+            <a:spLocks noGrp="1"/>
+          </p:cNvSpPr>
           <p:nvPr>
-            <p:ph idx="100" type="title" hasCustomPrompt="1"/>
+            <p:ph type="title" idx="100" hasCustomPrompt="1"/>
           </p:nvPr>
         </p:nvSpPr>
         <p:spPr>
@@ -11110,7 +11493,7 @@
           <a:bodyPr wrap="square" lIns="0" tIns="0" rIns="0" bIns="0" rtlCol="0" anchor="ctr"/>
           <a:lstStyle/>
           <a:p>
-            <a:pPr algn="l" indent="0" marL="0">
+            <a:pPr marL="0" indent="0" algn="l">
               <a:buNone/>
             </a:pPr>
             <a:r>
@@ -11152,6 +11535,13 @@
             <a:prstDash val="solid"/>
           </a:ln>
         </p:spPr>
+        <p:txBody>
+          <a:bodyPr/>
+          <a:lstStyle/>
+          <a:p>
+            <a:endParaRPr lang="en-US"/>
+          </a:p>
+        </p:txBody>
       </p:sp>
       <p:sp>
         <p:nvSpPr>
@@ -11174,7 +11564,7 @@
           <a:bodyPr wrap="square" lIns="0" tIns="0" rIns="0" bIns="0" rtlCol="0" anchor="b"/>
           <a:lstStyle/>
           <a:p>
-            <a:pPr algn="l" indent="0" marL="0">
+            <a:pPr marL="0" indent="0" algn="l">
               <a:buNone/>
             </a:pPr>
             <a:r>
@@ -11188,9 +11578,6 @@
               </a:rPr>
               <a:t>21</a:t>
             </a:r>
-            <a:pPr algn="l" indent="0" marL="0">
-              <a:buNone/>
-            </a:pPr>
             <a:r>
               <a:rPr lang="en-US" sz="1400" dirty="0">
                 <a:solidFill>
@@ -11230,6 +11617,13 @@
             <a:prstDash val="solid"/>
           </a:ln>
         </p:spPr>
+        <p:txBody>
+          <a:bodyPr/>
+          <a:lstStyle/>
+          <a:p>
+            <a:endParaRPr lang="en-US"/>
+          </a:p>
+        </p:txBody>
       </p:sp>
       <p:sp>
         <p:nvSpPr>
@@ -11252,7 +11646,7 @@
           <a:bodyPr wrap="square" lIns="0" tIns="0" rIns="0" bIns="0" rtlCol="0" anchor="t"/>
           <a:lstStyle/>
           <a:p>
-            <a:pPr algn="l" indent="0" marL="0">
+            <a:pPr marL="0" indent="0" algn="l">
               <a:buNone/>
             </a:pPr>
             <a:r>
@@ -11266,9 +11660,6 @@
               </a:rPr>
               <a:t>2</a:t>
             </a:r>
-            <a:pPr algn="l" indent="0" marL="0">
-              <a:buNone/>
-            </a:pPr>
             <a:r>
               <a:rPr lang="en-US" sz="1400" dirty="0">
                 <a:solidFill>
@@ -11308,6 +11699,13 @@
             <a:prstDash val="solid"/>
           </a:ln>
         </p:spPr>
+        <p:txBody>
+          <a:bodyPr/>
+          <a:lstStyle/>
+          <a:p>
+            <a:endParaRPr lang="en-US"/>
+          </a:p>
+        </p:txBody>
       </p:sp>
       <p:sp>
         <p:nvSpPr>
@@ -11330,7 +11728,7 @@
           <a:bodyPr wrap="square" lIns="0" tIns="0" rIns="0" bIns="0" rtlCol="0" anchor="b"/>
           <a:lstStyle/>
           <a:p>
-            <a:pPr algn="l" indent="0" marL="0">
+            <a:pPr marL="0" indent="0" algn="l">
               <a:buNone/>
             </a:pPr>
             <a:r>
@@ -11344,9 +11742,6 @@
               </a:rPr>
               <a:t>24</a:t>
             </a:r>
-            <a:pPr algn="l" indent="0" marL="0">
-              <a:buNone/>
-            </a:pPr>
             <a:r>
               <a:rPr lang="en-US" sz="1400" dirty="0">
                 <a:solidFill>
@@ -11386,6 +11781,13 @@
             <a:prstDash val="solid"/>
           </a:ln>
         </p:spPr>
+        <p:txBody>
+          <a:bodyPr/>
+          <a:lstStyle/>
+          <a:p>
+            <a:endParaRPr lang="en-US"/>
+          </a:p>
+        </p:txBody>
       </p:sp>
       <p:sp>
         <p:nvSpPr>
@@ -11408,7 +11810,7 @@
           <a:bodyPr wrap="square" lIns="0" tIns="0" rIns="0" bIns="0" rtlCol="0" anchor="t"/>
           <a:lstStyle/>
           <a:p>
-            <a:pPr algn="r" indent="0" marL="0">
+            <a:pPr marL="0" indent="0" algn="r">
               <a:buNone/>
             </a:pPr>
             <a:r>
@@ -11422,9 +11824,6 @@
               </a:rPr>
               <a:t>3</a:t>
             </a:r>
-            <a:pPr algn="r" indent="0" marL="0">
-              <a:buNone/>
-            </a:pPr>
             <a:r>
               <a:rPr lang="en-US" sz="1400" dirty="0">
                 <a:solidFill>
@@ -11461,7 +11860,7 @@
           <a:bodyPr wrap="square" lIns="0" tIns="0" rIns="0" bIns="0" rtlCol="0" anchor="t"/>
           <a:lstStyle/>
           <a:p>
-            <a:pPr algn="l" indent="0" marL="0">
+            <a:pPr marL="0" indent="0" algn="l">
               <a:buNone/>
             </a:pPr>
             <a:r>
@@ -11481,7 +11880,7 @@
       </p:sp>
       <p:graphicFrame>
         <p:nvGraphicFramePr>
-          <p:cNvPr id="10" name="Table 0"/>
+          <p:cNvPr id="3" name="Table 0"/>
           <p:cNvGraphicFramePr>
             <a:graphicFrameLocks noGrp="1"/>
           </p:cNvGraphicFramePr>
@@ -11502,11 +11901,41 @@
             <a:tbl>
               <a:tblPr/>
               <a:tblGrid>
-                <a:gridCol w="960120"/>
-                <a:gridCol w="4297680"/>
-                <a:gridCol w="914400"/>
-                <a:gridCol w="822960"/>
-                <a:gridCol w="1051560"/>
+                <a:gridCol w="960120">
+                  <a:extLst>
+                    <a:ext uri="{9D8B030D-6E8A-4147-A177-3AD203B41FA5}">
+                      <a16:colId xmlns:a16="http://schemas.microsoft.com/office/drawing/2014/main" val="20000"/>
+                    </a:ext>
+                  </a:extLst>
+                </a:gridCol>
+                <a:gridCol w="4297680">
+                  <a:extLst>
+                    <a:ext uri="{9D8B030D-6E8A-4147-A177-3AD203B41FA5}">
+                      <a16:colId xmlns:a16="http://schemas.microsoft.com/office/drawing/2014/main" val="20001"/>
+                    </a:ext>
+                  </a:extLst>
+                </a:gridCol>
+                <a:gridCol w="914400">
+                  <a:extLst>
+                    <a:ext uri="{9D8B030D-6E8A-4147-A177-3AD203B41FA5}">
+                      <a16:colId xmlns:a16="http://schemas.microsoft.com/office/drawing/2014/main" val="20002"/>
+                    </a:ext>
+                  </a:extLst>
+                </a:gridCol>
+                <a:gridCol w="822960">
+                  <a:extLst>
+                    <a:ext uri="{9D8B030D-6E8A-4147-A177-3AD203B41FA5}">
+                      <a16:colId xmlns:a16="http://schemas.microsoft.com/office/drawing/2014/main" val="20003"/>
+                    </a:ext>
+                  </a:extLst>
+                </a:gridCol>
+                <a:gridCol w="1051560">
+                  <a:extLst>
+                    <a:ext uri="{9D8B030D-6E8A-4147-A177-3AD203B41FA5}">
+                      <a16:colId xmlns:a16="http://schemas.microsoft.com/office/drawing/2014/main" val="20004"/>
+                    </a:ext>
+                  </a:extLst>
+                </a:gridCol>
               </a:tblGrid>
               <a:tr h="274320">
                 <a:tc>
@@ -11514,7 +11943,7 @@
                     <a:bodyPr/>
                     <a:lstStyle/>
                     <a:p>
-                      <a:pPr indent="0" marL="0">
+                      <a:pPr marL="0" indent="0">
                         <a:buNone/>
                       </a:pPr>
                       <a:r>
@@ -11561,7 +11990,7 @@
                     <a:bodyPr/>
                     <a:lstStyle/>
                     <a:p>
-                      <a:pPr indent="0" marL="0">
+                      <a:pPr marL="0" indent="0">
                         <a:buNone/>
                       </a:pPr>
                       <a:r>
@@ -11608,7 +12037,7 @@
                     <a:bodyPr/>
                     <a:lstStyle/>
                     <a:p>
-                      <a:pPr algn="ctr" indent="0" marL="0">
+                      <a:pPr marL="0" indent="0" algn="ctr">
                         <a:buNone/>
                       </a:pPr>
                       <a:r>
@@ -11655,7 +12084,7 @@
                     <a:bodyPr/>
                     <a:lstStyle/>
                     <a:p>
-                      <a:pPr algn="ctr" indent="0" marL="0">
+                      <a:pPr marL="0" indent="0" algn="ctr">
                         <a:buNone/>
                       </a:pPr>
                       <a:r>
@@ -11702,7 +12131,7 @@
                     <a:bodyPr/>
                     <a:lstStyle/>
                     <a:p>
-                      <a:pPr algn="ctr" indent="0" marL="0">
+                      <a:pPr marL="0" indent="0" algn="ctr">
                         <a:buNone/>
                       </a:pPr>
                       <a:r>
@@ -11744,6 +12173,11 @@
                     </a:lnB>
                   </a:tcPr>
                 </a:tc>
+                <a:extLst>
+                  <a:ext uri="{0D108BD9-81ED-4DB2-BD59-A6C34878D82A}">
+                    <a16:rowId xmlns:a16="http://schemas.microsoft.com/office/drawing/2014/main" val="10000"/>
+                  </a:ext>
+                </a:extLst>
               </a:tr>
               <a:tr h="475488">
                 <a:tc>
@@ -11751,7 +12185,7 @@
                     <a:bodyPr/>
                     <a:lstStyle/>
                     <a:p>
-                      <a:pPr indent="0" marL="0">
+                      <a:pPr marL="0" indent="0">
                         <a:buNone/>
                       </a:pPr>
                       <a:r>
@@ -11779,8 +12213,14 @@
                     <a:lnR w="0" cap="flat" cmpd="sng" algn="ctr">
                       <a:noFill/>
                     </a:lnR>
-                    <a:lnT w="0" cap="flat" cmpd="sng" algn="ctr">
-                      <a:noFill/>
+                    <a:lnT w="12700" cap="flat" cmpd="sng" algn="ctr">
+                      <a:solidFill>
+                        <a:srgbClr val="1A1A1A"/>
+                      </a:solidFill>
+                      <a:prstDash val="solid"/>
+                      <a:round/>
+                      <a:headEnd type="none" w="med" len="med"/>
+                      <a:tailEnd type="none" w="med" len="med"/>
                     </a:lnT>
                     <a:lnB w="9525" cap="flat" cmpd="sng" algn="ctr">
                       <a:solidFill>
@@ -11798,7 +12238,7 @@
                     <a:bodyPr/>
                     <a:lstStyle/>
                     <a:p>
-                      <a:pPr indent="0" marL="0">
+                      <a:pPr marL="0" indent="0">
                         <a:buNone/>
                       </a:pPr>
                       <a:r>
@@ -11819,7 +12259,7 @@
                       </a:endParaRPr>
                     </a:p>
                     <a:p>
-                      <a:pPr indent="0" marL="0">
+                      <a:pPr marL="0" indent="0">
                         <a:buNone/>
                       </a:pPr>
                       <a:r>
@@ -11847,8 +12287,14 @@
                     <a:lnR w="0" cap="flat" cmpd="sng" algn="ctr">
                       <a:noFill/>
                     </a:lnR>
-                    <a:lnT w="0" cap="flat" cmpd="sng" algn="ctr">
-                      <a:noFill/>
+                    <a:lnT w="12700" cap="flat" cmpd="sng" algn="ctr">
+                      <a:solidFill>
+                        <a:srgbClr val="1A1A1A"/>
+                      </a:solidFill>
+                      <a:prstDash val="solid"/>
+                      <a:round/>
+                      <a:headEnd type="none" w="med" len="med"/>
+                      <a:tailEnd type="none" w="med" len="med"/>
                     </a:lnT>
                     <a:lnB w="9525" cap="flat" cmpd="sng" algn="ctr">
                       <a:solidFill>
@@ -11866,7 +12312,7 @@
                     <a:bodyPr/>
                     <a:lstStyle/>
                     <a:p>
-                      <a:pPr algn="ctr" indent="0" marL="0">
+                      <a:pPr marL="0" indent="0" algn="ctr">
                         <a:buNone/>
                       </a:pPr>
                       <a:r>
@@ -11894,8 +12340,14 @@
                     <a:lnR w="0" cap="flat" cmpd="sng" algn="ctr">
                       <a:noFill/>
                     </a:lnR>
-                    <a:lnT w="0" cap="flat" cmpd="sng" algn="ctr">
-                      <a:noFill/>
+                    <a:lnT w="12700" cap="flat" cmpd="sng" algn="ctr">
+                      <a:solidFill>
+                        <a:srgbClr val="1A1A1A"/>
+                      </a:solidFill>
+                      <a:prstDash val="solid"/>
+                      <a:round/>
+                      <a:headEnd type="none" w="med" len="med"/>
+                      <a:tailEnd type="none" w="med" len="med"/>
                     </a:lnT>
                     <a:lnB w="9525" cap="flat" cmpd="sng" algn="ctr">
                       <a:solidFill>
@@ -11913,7 +12365,7 @@
                     <a:bodyPr/>
                     <a:lstStyle/>
                     <a:p>
-                      <a:pPr algn="ctr" indent="0" marL="0">
+                      <a:pPr marL="0" indent="0" algn="ctr">
                         <a:buNone/>
                       </a:pPr>
                       <a:r>
@@ -11941,8 +12393,14 @@
                     <a:lnR w="0" cap="flat" cmpd="sng" algn="ctr">
                       <a:noFill/>
                     </a:lnR>
-                    <a:lnT w="0" cap="flat" cmpd="sng" algn="ctr">
-                      <a:noFill/>
+                    <a:lnT w="12700" cap="flat" cmpd="sng" algn="ctr">
+                      <a:solidFill>
+                        <a:srgbClr val="1A1A1A"/>
+                      </a:solidFill>
+                      <a:prstDash val="solid"/>
+                      <a:round/>
+                      <a:headEnd type="none" w="med" len="med"/>
+                      <a:tailEnd type="none" w="med" len="med"/>
                     </a:lnT>
                     <a:lnB w="9525" cap="flat" cmpd="sng" algn="ctr">
                       <a:solidFill>
@@ -11960,7 +12418,7 @@
                     <a:bodyPr/>
                     <a:lstStyle/>
                     <a:p>
-                      <a:pPr algn="ctr" indent="0" marL="0">
+                      <a:pPr marL="0" indent="0" algn="ctr">
                         <a:buNone/>
                       </a:pPr>
                       <a:r>
@@ -11988,8 +12446,14 @@
                     <a:lnR w="0" cap="flat" cmpd="sng" algn="ctr">
                       <a:noFill/>
                     </a:lnR>
-                    <a:lnT w="0" cap="flat" cmpd="sng" algn="ctr">
-                      <a:noFill/>
+                    <a:lnT w="12700" cap="flat" cmpd="sng" algn="ctr">
+                      <a:solidFill>
+                        <a:srgbClr val="1A1A1A"/>
+                      </a:solidFill>
+                      <a:prstDash val="solid"/>
+                      <a:round/>
+                      <a:headEnd type="none" w="med" len="med"/>
+                      <a:tailEnd type="none" w="med" len="med"/>
                     </a:lnT>
                     <a:lnB w="9525" cap="flat" cmpd="sng" algn="ctr">
                       <a:solidFill>
@@ -12002,6 +12466,11 @@
                     </a:lnB>
                   </a:tcPr>
                 </a:tc>
+                <a:extLst>
+                  <a:ext uri="{0D108BD9-81ED-4DB2-BD59-A6C34878D82A}">
+                    <a16:rowId xmlns:a16="http://schemas.microsoft.com/office/drawing/2014/main" val="10001"/>
+                  </a:ext>
+                </a:extLst>
               </a:tr>
               <a:tr h="475488">
                 <a:tc>
@@ -12009,7 +12478,7 @@
                     <a:bodyPr/>
                     <a:lstStyle/>
                     <a:p>
-                      <a:pPr indent="0" marL="0">
+                      <a:pPr marL="0" indent="0">
                         <a:buNone/>
                       </a:pPr>
                       <a:r>
@@ -12037,8 +12506,14 @@
                     <a:lnR w="0" cap="flat" cmpd="sng" algn="ctr">
                       <a:noFill/>
                     </a:lnR>
-                    <a:lnT w="0" cap="flat" cmpd="sng" algn="ctr">
-                      <a:noFill/>
+                    <a:lnT w="9525" cap="flat" cmpd="sng" algn="ctr">
+                      <a:solidFill>
+                        <a:srgbClr val="C3C9D0"/>
+                      </a:solidFill>
+                      <a:prstDash val="solid"/>
+                      <a:round/>
+                      <a:headEnd type="none" w="med" len="med"/>
+                      <a:tailEnd type="none" w="med" len="med"/>
                     </a:lnT>
                     <a:lnB w="9525" cap="flat" cmpd="sng" algn="ctr">
                       <a:solidFill>
@@ -12056,7 +12531,7 @@
                     <a:bodyPr/>
                     <a:lstStyle/>
                     <a:p>
-                      <a:pPr indent="0" marL="0">
+                      <a:pPr marL="0" indent="0">
                         <a:buNone/>
                       </a:pPr>
                       <a:r>
@@ -12077,7 +12552,7 @@
                       </a:endParaRPr>
                     </a:p>
                     <a:p>
-                      <a:pPr indent="0" marL="0">
+                      <a:pPr marL="0" indent="0">
                         <a:buNone/>
                       </a:pPr>
                       <a:r>
@@ -12105,8 +12580,14 @@
                     <a:lnR w="0" cap="flat" cmpd="sng" algn="ctr">
                       <a:noFill/>
                     </a:lnR>
-                    <a:lnT w="0" cap="flat" cmpd="sng" algn="ctr">
-                      <a:noFill/>
+                    <a:lnT w="9525" cap="flat" cmpd="sng" algn="ctr">
+                      <a:solidFill>
+                        <a:srgbClr val="C3C9D0"/>
+                      </a:solidFill>
+                      <a:prstDash val="solid"/>
+                      <a:round/>
+                      <a:headEnd type="none" w="med" len="med"/>
+                      <a:tailEnd type="none" w="med" len="med"/>
                     </a:lnT>
                     <a:lnB w="9525" cap="flat" cmpd="sng" algn="ctr">
                       <a:solidFill>
@@ -12124,7 +12605,7 @@
                     <a:bodyPr/>
                     <a:lstStyle/>
                     <a:p>
-                      <a:pPr algn="ctr" indent="0" marL="0">
+                      <a:pPr marL="0" indent="0" algn="ctr">
                         <a:buNone/>
                       </a:pPr>
                       <a:r>
@@ -12152,8 +12633,14 @@
                     <a:lnR w="0" cap="flat" cmpd="sng" algn="ctr">
                       <a:noFill/>
                     </a:lnR>
-                    <a:lnT w="0" cap="flat" cmpd="sng" algn="ctr">
-                      <a:noFill/>
+                    <a:lnT w="9525" cap="flat" cmpd="sng" algn="ctr">
+                      <a:solidFill>
+                        <a:srgbClr val="C3C9D0"/>
+                      </a:solidFill>
+                      <a:prstDash val="solid"/>
+                      <a:round/>
+                      <a:headEnd type="none" w="med" len="med"/>
+                      <a:tailEnd type="none" w="med" len="med"/>
                     </a:lnT>
                     <a:lnB w="9525" cap="flat" cmpd="sng" algn="ctr">
                       <a:solidFill>
@@ -12171,7 +12658,7 @@
                     <a:bodyPr/>
                     <a:lstStyle/>
                     <a:p>
-                      <a:pPr algn="ctr" indent="0" marL="0">
+                      <a:pPr marL="0" indent="0" algn="ctr">
                         <a:buNone/>
                       </a:pPr>
                       <a:r>
@@ -12199,8 +12686,14 @@
                     <a:lnR w="0" cap="flat" cmpd="sng" algn="ctr">
                       <a:noFill/>
                     </a:lnR>
-                    <a:lnT w="0" cap="flat" cmpd="sng" algn="ctr">
-                      <a:noFill/>
+                    <a:lnT w="9525" cap="flat" cmpd="sng" algn="ctr">
+                      <a:solidFill>
+                        <a:srgbClr val="C3C9D0"/>
+                      </a:solidFill>
+                      <a:prstDash val="solid"/>
+                      <a:round/>
+                      <a:headEnd type="none" w="med" len="med"/>
+                      <a:tailEnd type="none" w="med" len="med"/>
                     </a:lnT>
                     <a:lnB w="9525" cap="flat" cmpd="sng" algn="ctr">
                       <a:solidFill>
@@ -12218,7 +12711,7 @@
                     <a:bodyPr/>
                     <a:lstStyle/>
                     <a:p>
-                      <a:pPr algn="ctr" indent="0" marL="0">
+                      <a:pPr marL="0" indent="0" algn="ctr">
                         <a:buNone/>
                       </a:pPr>
                       <a:r>
@@ -12246,8 +12739,14 @@
                     <a:lnR w="0" cap="flat" cmpd="sng" algn="ctr">
                       <a:noFill/>
                     </a:lnR>
-                    <a:lnT w="0" cap="flat" cmpd="sng" algn="ctr">
-                      <a:noFill/>
+                    <a:lnT w="9525" cap="flat" cmpd="sng" algn="ctr">
+                      <a:solidFill>
+                        <a:srgbClr val="C3C9D0"/>
+                      </a:solidFill>
+                      <a:prstDash val="solid"/>
+                      <a:round/>
+                      <a:headEnd type="none" w="med" len="med"/>
+                      <a:tailEnd type="none" w="med" len="med"/>
                     </a:lnT>
                     <a:lnB w="9525" cap="flat" cmpd="sng" algn="ctr">
                       <a:solidFill>
@@ -12260,6 +12759,11 @@
                     </a:lnB>
                   </a:tcPr>
                 </a:tc>
+                <a:extLst>
+                  <a:ext uri="{0D108BD9-81ED-4DB2-BD59-A6C34878D82A}">
+                    <a16:rowId xmlns:a16="http://schemas.microsoft.com/office/drawing/2014/main" val="10002"/>
+                  </a:ext>
+                </a:extLst>
               </a:tr>
               <a:tr h="475488">
                 <a:tc>
@@ -12267,7 +12771,7 @@
                     <a:bodyPr/>
                     <a:lstStyle/>
                     <a:p>
-                      <a:pPr indent="0" marL="0">
+                      <a:pPr marL="0" indent="0">
                         <a:buNone/>
                       </a:pPr>
                       <a:r>
@@ -12295,8 +12799,14 @@
                     <a:lnR w="0" cap="flat" cmpd="sng" algn="ctr">
                       <a:noFill/>
                     </a:lnR>
-                    <a:lnT w="0" cap="flat" cmpd="sng" algn="ctr">
-                      <a:noFill/>
+                    <a:lnT w="9525" cap="flat" cmpd="sng" algn="ctr">
+                      <a:solidFill>
+                        <a:srgbClr val="C3C9D0"/>
+                      </a:solidFill>
+                      <a:prstDash val="solid"/>
+                      <a:round/>
+                      <a:headEnd type="none" w="med" len="med"/>
+                      <a:tailEnd type="none" w="med" len="med"/>
                     </a:lnT>
                     <a:lnB w="9525" cap="flat" cmpd="sng" algn="ctr">
                       <a:solidFill>
@@ -12314,7 +12824,7 @@
                     <a:bodyPr/>
                     <a:lstStyle/>
                     <a:p>
-                      <a:pPr indent="0" marL="0">
+                      <a:pPr marL="0" indent="0">
                         <a:buNone/>
                       </a:pPr>
                       <a:r>
@@ -12335,7 +12845,7 @@
                       </a:endParaRPr>
                     </a:p>
                     <a:p>
-                      <a:pPr indent="0" marL="0">
+                      <a:pPr marL="0" indent="0">
                         <a:buNone/>
                       </a:pPr>
                       <a:r>
@@ -12363,8 +12873,14 @@
                     <a:lnR w="0" cap="flat" cmpd="sng" algn="ctr">
                       <a:noFill/>
                     </a:lnR>
-                    <a:lnT w="0" cap="flat" cmpd="sng" algn="ctr">
-                      <a:noFill/>
+                    <a:lnT w="9525" cap="flat" cmpd="sng" algn="ctr">
+                      <a:solidFill>
+                        <a:srgbClr val="C3C9D0"/>
+                      </a:solidFill>
+                      <a:prstDash val="solid"/>
+                      <a:round/>
+                      <a:headEnd type="none" w="med" len="med"/>
+                      <a:tailEnd type="none" w="med" len="med"/>
                     </a:lnT>
                     <a:lnB w="9525" cap="flat" cmpd="sng" algn="ctr">
                       <a:solidFill>
@@ -12382,7 +12898,7 @@
                     <a:bodyPr/>
                     <a:lstStyle/>
                     <a:p>
-                      <a:pPr algn="ctr" indent="0" marL="0">
+                      <a:pPr marL="0" indent="0" algn="ctr">
                         <a:buNone/>
                       </a:pPr>
                       <a:r>
@@ -12410,8 +12926,14 @@
                     <a:lnR w="0" cap="flat" cmpd="sng" algn="ctr">
                       <a:noFill/>
                     </a:lnR>
-                    <a:lnT w="0" cap="flat" cmpd="sng" algn="ctr">
-                      <a:noFill/>
+                    <a:lnT w="9525" cap="flat" cmpd="sng" algn="ctr">
+                      <a:solidFill>
+                        <a:srgbClr val="C3C9D0"/>
+                      </a:solidFill>
+                      <a:prstDash val="solid"/>
+                      <a:round/>
+                      <a:headEnd type="none" w="med" len="med"/>
+                      <a:tailEnd type="none" w="med" len="med"/>
                     </a:lnT>
                     <a:lnB w="9525" cap="flat" cmpd="sng" algn="ctr">
                       <a:solidFill>
@@ -12429,7 +12951,7 @@
                     <a:bodyPr/>
                     <a:lstStyle/>
                     <a:p>
-                      <a:pPr algn="ctr" indent="0" marL="0">
+                      <a:pPr marL="0" indent="0" algn="ctr">
                         <a:buNone/>
                       </a:pPr>
                       <a:r>
@@ -12457,8 +12979,14 @@
                     <a:lnR w="0" cap="flat" cmpd="sng" algn="ctr">
                       <a:noFill/>
                     </a:lnR>
-                    <a:lnT w="0" cap="flat" cmpd="sng" algn="ctr">
-                      <a:noFill/>
+                    <a:lnT w="9525" cap="flat" cmpd="sng" algn="ctr">
+                      <a:solidFill>
+                        <a:srgbClr val="C3C9D0"/>
+                      </a:solidFill>
+                      <a:prstDash val="solid"/>
+                      <a:round/>
+                      <a:headEnd type="none" w="med" len="med"/>
+                      <a:tailEnd type="none" w="med" len="med"/>
                     </a:lnT>
                     <a:lnB w="9525" cap="flat" cmpd="sng" algn="ctr">
                       <a:solidFill>
@@ -12476,7 +13004,7 @@
                     <a:bodyPr/>
                     <a:lstStyle/>
                     <a:p>
-                      <a:pPr algn="ctr" indent="0" marL="0">
+                      <a:pPr marL="0" indent="0" algn="ctr">
                         <a:buNone/>
                       </a:pPr>
                       <a:r>
@@ -12504,8 +13032,14 @@
                     <a:lnR w="0" cap="flat" cmpd="sng" algn="ctr">
                       <a:noFill/>
                     </a:lnR>
-                    <a:lnT w="0" cap="flat" cmpd="sng" algn="ctr">
-                      <a:noFill/>
+                    <a:lnT w="9525" cap="flat" cmpd="sng" algn="ctr">
+                      <a:solidFill>
+                        <a:srgbClr val="C3C9D0"/>
+                      </a:solidFill>
+                      <a:prstDash val="solid"/>
+                      <a:round/>
+                      <a:headEnd type="none" w="med" len="med"/>
+                      <a:tailEnd type="none" w="med" len="med"/>
                     </a:lnT>
                     <a:lnB w="9525" cap="flat" cmpd="sng" algn="ctr">
                       <a:solidFill>
@@ -12518,6 +13052,11 @@
                     </a:lnB>
                   </a:tcPr>
                 </a:tc>
+                <a:extLst>
+                  <a:ext uri="{0D108BD9-81ED-4DB2-BD59-A6C34878D82A}">
+                    <a16:rowId xmlns:a16="http://schemas.microsoft.com/office/drawing/2014/main" val="10003"/>
+                  </a:ext>
+                </a:extLst>
               </a:tr>
             </a:tbl>
           </a:graphicData>
@@ -12544,7 +13083,7 @@
           <a:bodyPr wrap="square" lIns="0" tIns="0" rIns="0" bIns="0" rtlCol="0" anchor="t"/>
           <a:lstStyle/>
           <a:p>
-            <a:pPr algn="l" indent="0" marL="0">
+            <a:pPr marL="0" indent="0" algn="l">
               <a:buNone/>
             </a:pPr>
             <a:r>
@@ -12582,7 +13121,7 @@
           </a:prstGeom>
           <a:extLst>
             <a:ext uri="{C572A759-6A51-4108-AA02-DFA0A04FC94B}">
-              <ma14:wrappingTextBoxFlag xmlns:ma14="http://schemas.microsoft.com/office/mac/drawingml/2011/main" val="0"/>
+              <ma14:wrappingTextBoxFlag xmlns:ma14="http://schemas.microsoft.com/office/mac/drawingml/2011/main" xmlns="" val="0"/>
             </a:ext>
           </a:extLst>
         </p:spPr>
@@ -12603,7 +13142,7 @@
           <a:p>
             <a:pPr algn="r"/>
             <a:fld id="{F7021451-1387-4CA6-816F-3879F97B5CBC}" type="slidenum">
-              <a:rPr b="0" lang="en-US"/>
+              <a:rPr lang="en-US" b="0"/>
               <a:t>9</a:t>
             </a:fld>
             <a:endParaRPr lang="en-US"/>
@@ -12911,4 +13450,319 @@
     </a:ext>
   </a:extLst>
 </a:theme>
+</file>
+
+<file path=ppt/theme/theme2.xml><?xml version="1.0" encoding="utf-8"?>
+<a:theme xmlns:a="http://schemas.openxmlformats.org/drawingml/2006/main" name="Office Theme">
+  <a:themeElements>
+    <a:clrScheme name="Office">
+      <a:dk1>
+        <a:sysClr val="windowText" lastClr="000000"/>
+      </a:dk1>
+      <a:lt1>
+        <a:sysClr val="window" lastClr="FFFFFF"/>
+      </a:lt1>
+      <a:dk2>
+        <a:srgbClr val="0E2841"/>
+      </a:dk2>
+      <a:lt2>
+        <a:srgbClr val="E8E8E8"/>
+      </a:lt2>
+      <a:accent1>
+        <a:srgbClr val="156082"/>
+      </a:accent1>
+      <a:accent2>
+        <a:srgbClr val="E97132"/>
+      </a:accent2>
+      <a:accent3>
+        <a:srgbClr val="196B24"/>
+      </a:accent3>
+      <a:accent4>
+        <a:srgbClr val="0F9ED5"/>
+      </a:accent4>
+      <a:accent5>
+        <a:srgbClr val="A02B93"/>
+      </a:accent5>
+      <a:accent6>
+        <a:srgbClr val="4EA72E"/>
+      </a:accent6>
+      <a:hlink>
+        <a:srgbClr val="467886"/>
+      </a:hlink>
+      <a:folHlink>
+        <a:srgbClr val="96607D"/>
+      </a:folHlink>
+    </a:clrScheme>
+    <a:fontScheme name="Office">
+      <a:majorFont>
+        <a:latin typeface="Aptos Display" panose="02110004020202020204"/>
+        <a:ea typeface=""/>
+        <a:cs typeface=""/>
+        <a:font script="Jpan" typeface="游ゴシック Light"/>
+        <a:font script="Hang" typeface="맑은 고딕"/>
+        <a:font script="Hans" typeface="等线 Light"/>
+        <a:font script="Hant" typeface="新細明體"/>
+        <a:font script="Arab" typeface="Times New Roman"/>
+        <a:font script="Hebr" typeface="Times New Roman"/>
+        <a:font script="Thai" typeface="Angsana New"/>
+        <a:font script="Ethi" typeface="Nyala"/>
+        <a:font script="Beng" typeface="Vrinda"/>
+        <a:font script="Gujr" typeface="Shruti"/>
+        <a:font script="Khmr" typeface="MoolBoran"/>
+        <a:font script="Knda" typeface="Tunga"/>
+        <a:font script="Guru" typeface="Raavi"/>
+        <a:font script="Cans" typeface="Euphemia"/>
+        <a:font script="Cher" typeface="Plantagenet Cherokee"/>
+        <a:font script="Yiii" typeface="Microsoft Yi Baiti"/>
+        <a:font script="Tibt" typeface="Microsoft Himalaya"/>
+        <a:font script="Thaa" typeface="MV Boli"/>
+        <a:font script="Deva" typeface="Mangal"/>
+        <a:font script="Telu" typeface="Gautami"/>
+        <a:font script="Taml" typeface="Latha"/>
+        <a:font script="Syrc" typeface="Estrangelo Edessa"/>
+        <a:font script="Orya" typeface="Kalinga"/>
+        <a:font script="Mlym" typeface="Kartika"/>
+        <a:font script="Laoo" typeface="DokChampa"/>
+        <a:font script="Sinh" typeface="Iskoola Pota"/>
+        <a:font script="Mong" typeface="Mongolian Baiti"/>
+        <a:font script="Viet" typeface="Times New Roman"/>
+        <a:font script="Uigh" typeface="Microsoft Uighur"/>
+        <a:font script="Geor" typeface="Sylfaen"/>
+        <a:font script="Armn" typeface="Arial"/>
+        <a:font script="Bugi" typeface="Leelawadee UI"/>
+        <a:font script="Bopo" typeface="Microsoft JhengHei"/>
+        <a:font script="Java" typeface="Javanese Text"/>
+        <a:font script="Lisu" typeface="Segoe UI"/>
+        <a:font script="Mymr" typeface="Myanmar Text"/>
+        <a:font script="Nkoo" typeface="Ebrima"/>
+        <a:font script="Olck" typeface="Nirmala UI"/>
+        <a:font script="Osma" typeface="Ebrima"/>
+        <a:font script="Phag" typeface="Phagspa"/>
+        <a:font script="Syrn" typeface="Estrangelo Edessa"/>
+        <a:font script="Syrj" typeface="Estrangelo Edessa"/>
+        <a:font script="Syre" typeface="Estrangelo Edessa"/>
+        <a:font script="Sora" typeface="Nirmala UI"/>
+        <a:font script="Tale" typeface="Microsoft Tai Le"/>
+        <a:font script="Talu" typeface="Microsoft New Tai Lue"/>
+        <a:font script="Tfng" typeface="Ebrima"/>
+      </a:majorFont>
+      <a:minorFont>
+        <a:latin typeface="Aptos" panose="02110004020202020204"/>
+        <a:ea typeface=""/>
+        <a:cs typeface=""/>
+        <a:font script="Jpan" typeface="游ゴシック"/>
+        <a:font script="Hang" typeface="맑은 고딕"/>
+        <a:font script="Hans" typeface="等线"/>
+        <a:font script="Hant" typeface="新細明體"/>
+        <a:font script="Arab" typeface="Arial"/>
+        <a:font script="Hebr" typeface="Arial"/>
+        <a:font script="Thai" typeface="Cordia New"/>
+        <a:font script="Ethi" typeface="Nyala"/>
+        <a:font script="Beng" typeface="Vrinda"/>
+        <a:font script="Gujr" typeface="Shruti"/>
+        <a:font script="Khmr" typeface="DaunPenh"/>
+        <a:font script="Knda" typeface="Tunga"/>
+        <a:font script="Guru" typeface="Raavi"/>
+        <a:font script="Cans" typeface="Euphemia"/>
+        <a:font script="Cher" typeface="Plantagenet Cherokee"/>
+        <a:font script="Yiii" typeface="Microsoft Yi Baiti"/>
+        <a:font script="Tibt" typeface="Microsoft Himalaya"/>
+        <a:font script="Thaa" typeface="MV Boli"/>
+        <a:font script="Deva" typeface="Mangal"/>
+        <a:font script="Telu" typeface="Gautami"/>
+        <a:font script="Taml" typeface="Latha"/>
+        <a:font script="Syrc" typeface="Estrangelo Edessa"/>
+        <a:font script="Orya" typeface="Kalinga"/>
+        <a:font script="Mlym" typeface="Kartika"/>
+        <a:font script="Laoo" typeface="DokChampa"/>
+        <a:font script="Sinh" typeface="Iskoola Pota"/>
+        <a:font script="Mong" typeface="Mongolian Baiti"/>
+        <a:font script="Viet" typeface="Arial"/>
+        <a:font script="Uigh" typeface="Microsoft Uighur"/>
+        <a:font script="Geor" typeface="Sylfaen"/>
+        <a:font script="Armn" typeface="Arial"/>
+        <a:font script="Bugi" typeface="Leelawadee UI"/>
+        <a:font script="Bopo" typeface="Microsoft JhengHei"/>
+        <a:font script="Java" typeface="Javanese Text"/>
+        <a:font script="Lisu" typeface="Segoe UI"/>
+        <a:font script="Mymr" typeface="Myanmar Text"/>
+        <a:font script="Nkoo" typeface="Ebrima"/>
+        <a:font script="Olck" typeface="Nirmala UI"/>
+        <a:font script="Osma" typeface="Ebrima"/>
+        <a:font script="Phag" typeface="Phagspa"/>
+        <a:font script="Syrn" typeface="Estrangelo Edessa"/>
+        <a:font script="Syrj" typeface="Estrangelo Edessa"/>
+        <a:font script="Syre" typeface="Estrangelo Edessa"/>
+        <a:font script="Sora" typeface="Nirmala UI"/>
+        <a:font script="Tale" typeface="Microsoft Tai Le"/>
+        <a:font script="Talu" typeface="Microsoft New Tai Lue"/>
+        <a:font script="Tfng" typeface="Ebrima"/>
+      </a:minorFont>
+    </a:fontScheme>
+    <a:fmtScheme name="Office">
+      <a:fillStyleLst>
+        <a:solidFill>
+          <a:schemeClr val="phClr"/>
+        </a:solidFill>
+        <a:gradFill rotWithShape="1">
+          <a:gsLst>
+            <a:gs pos="0">
+              <a:schemeClr val="phClr">
+                <a:lumMod val="110000"/>
+                <a:satMod val="105000"/>
+                <a:tint val="67000"/>
+              </a:schemeClr>
+            </a:gs>
+            <a:gs pos="50000">
+              <a:schemeClr val="phClr">
+                <a:lumMod val="105000"/>
+                <a:satMod val="103000"/>
+                <a:tint val="73000"/>
+              </a:schemeClr>
+            </a:gs>
+            <a:gs pos="100000">
+              <a:schemeClr val="phClr">
+                <a:lumMod val="105000"/>
+                <a:satMod val="109000"/>
+                <a:tint val="81000"/>
+              </a:schemeClr>
+            </a:gs>
+          </a:gsLst>
+          <a:lin ang="5400000" scaled="0"/>
+        </a:gradFill>
+        <a:gradFill rotWithShape="1">
+          <a:gsLst>
+            <a:gs pos="0">
+              <a:schemeClr val="phClr">
+                <a:satMod val="103000"/>
+                <a:lumMod val="102000"/>
+                <a:tint val="94000"/>
+              </a:schemeClr>
+            </a:gs>
+            <a:gs pos="50000">
+              <a:schemeClr val="phClr">
+                <a:satMod val="110000"/>
+                <a:lumMod val="100000"/>
+                <a:shade val="100000"/>
+              </a:schemeClr>
+            </a:gs>
+            <a:gs pos="100000">
+              <a:schemeClr val="phClr">
+                <a:lumMod val="99000"/>
+                <a:satMod val="120000"/>
+                <a:shade val="78000"/>
+              </a:schemeClr>
+            </a:gs>
+          </a:gsLst>
+          <a:lin ang="5400000" scaled="0"/>
+        </a:gradFill>
+      </a:fillStyleLst>
+      <a:lnStyleLst>
+        <a:ln w="12700" cap="flat" cmpd="sng" algn="ctr">
+          <a:solidFill>
+            <a:schemeClr val="phClr"/>
+          </a:solidFill>
+          <a:prstDash val="solid"/>
+          <a:miter lim="800000"/>
+        </a:ln>
+        <a:ln w="19050" cap="flat" cmpd="sng" algn="ctr">
+          <a:solidFill>
+            <a:schemeClr val="phClr"/>
+          </a:solidFill>
+          <a:prstDash val="solid"/>
+          <a:miter lim="800000"/>
+        </a:ln>
+        <a:ln w="25400" cap="flat" cmpd="sng" algn="ctr">
+          <a:solidFill>
+            <a:schemeClr val="phClr"/>
+          </a:solidFill>
+          <a:prstDash val="solid"/>
+          <a:miter lim="800000"/>
+        </a:ln>
+      </a:lnStyleLst>
+      <a:effectStyleLst>
+        <a:effectStyle>
+          <a:effectLst/>
+        </a:effectStyle>
+        <a:effectStyle>
+          <a:effectLst/>
+        </a:effectStyle>
+        <a:effectStyle>
+          <a:effectLst>
+            <a:outerShdw blurRad="57150" dist="19050" dir="5400000" algn="ctr" rotWithShape="0">
+              <a:srgbClr val="000000">
+                <a:alpha val="63000"/>
+              </a:srgbClr>
+            </a:outerShdw>
+          </a:effectLst>
+        </a:effectStyle>
+      </a:effectStyleLst>
+      <a:bgFillStyleLst>
+        <a:solidFill>
+          <a:schemeClr val="phClr"/>
+        </a:solidFill>
+        <a:solidFill>
+          <a:schemeClr val="phClr">
+            <a:tint val="95000"/>
+            <a:satMod val="170000"/>
+          </a:schemeClr>
+        </a:solidFill>
+        <a:gradFill rotWithShape="1">
+          <a:gsLst>
+            <a:gs pos="0">
+              <a:schemeClr val="phClr">
+                <a:tint val="93000"/>
+                <a:satMod val="150000"/>
+                <a:shade val="98000"/>
+                <a:lumMod val="102000"/>
+              </a:schemeClr>
+            </a:gs>
+            <a:gs pos="50000">
+              <a:schemeClr val="phClr">
+                <a:tint val="98000"/>
+                <a:satMod val="130000"/>
+                <a:shade val="90000"/>
+                <a:lumMod val="103000"/>
+              </a:schemeClr>
+            </a:gs>
+            <a:gs pos="100000">
+              <a:schemeClr val="phClr">
+                <a:shade val="63000"/>
+                <a:satMod val="120000"/>
+              </a:schemeClr>
+            </a:gs>
+          </a:gsLst>
+          <a:lin ang="5400000" scaled="0"/>
+        </a:gradFill>
+      </a:bgFillStyleLst>
+    </a:fmtScheme>
+  </a:themeElements>
+  <a:objectDefaults>
+    <a:lnDef>
+      <a:spPr/>
+      <a:bodyPr/>
+      <a:lstStyle/>
+      <a:style>
+        <a:lnRef idx="2">
+          <a:schemeClr val="accent1"/>
+        </a:lnRef>
+        <a:fillRef idx="0">
+          <a:schemeClr val="accent1"/>
+        </a:fillRef>
+        <a:effectRef idx="1">
+          <a:schemeClr val="accent1"/>
+        </a:effectRef>
+        <a:fontRef idx="minor">
+          <a:schemeClr val="tx1"/>
+        </a:fontRef>
+      </a:style>
+    </a:lnDef>
+  </a:objectDefaults>
+  <a:extraClrSchemeLst/>
+  <a:extLst>
+    <a:ext uri="{05A4C25C-085E-4340-85A3-A5531E510DB2}">
+      <thm15:themeFamily xmlns:thm15="http://schemas.microsoft.com/office/thememl/2012/main" name="Office Theme" id="{2E142A2C-CD16-42D6-873A-C26D2A0506FA}" vid="{1BDDFF52-6CD6-40A5-AB3C-68EB2F1E4D0A}"/>
+    </a:ext>
+  </a:extLst>
+</a:theme>
 </file>